--- a/public/videos/repositories/autohensei/autohensei-tech-preview.pptx
+++ b/public/videos/repositories/autohensei/autohensei-tech-preview.pptx
@@ -134,7 +134,7 @@
           <p:cNvPr id="2" name="タイトル 1">
             <a:extLst>
               <a:ext uri="{FF2B5EF4-FFF2-40B4-BE49-F238E27FC236}">
-                <a16:creationId xmlns:a16="http://schemas.microsoft.com/office/drawing/2014/main" id="{CA1ACBB5-15D4-C8B7-7696-440A1688E375}"/>
+                <a16:creationId xmlns:a16="http://schemas.microsoft.com/office/drawing/2014/main" id="{EAFBA7E3-C5C8-DE27-9BFC-2F3998266AE4}"/>
               </a:ext>
             </a:extLst>
           </p:cNvPr>
@@ -171,7 +171,7 @@
           <p:cNvPr id="3" name="字幕 2">
             <a:extLst>
               <a:ext uri="{FF2B5EF4-FFF2-40B4-BE49-F238E27FC236}">
-                <a16:creationId xmlns:a16="http://schemas.microsoft.com/office/drawing/2014/main" id="{759BA136-58B2-5E2F-74B9-5395964B5F85}"/>
+                <a16:creationId xmlns:a16="http://schemas.microsoft.com/office/drawing/2014/main" id="{0BA09C35-1038-0702-A9FF-56AFBD26E449}"/>
               </a:ext>
             </a:extLst>
           </p:cNvPr>
@@ -241,7 +241,7 @@
           <p:cNvPr id="4" name="日付プレースホルダー 3">
             <a:extLst>
               <a:ext uri="{FF2B5EF4-FFF2-40B4-BE49-F238E27FC236}">
-                <a16:creationId xmlns:a16="http://schemas.microsoft.com/office/drawing/2014/main" id="{793B73BC-4038-27E8-941D-3FA33224FDEC}"/>
+                <a16:creationId xmlns:a16="http://schemas.microsoft.com/office/drawing/2014/main" id="{75FAC912-C113-D167-B79B-76336EF7895B}"/>
               </a:ext>
             </a:extLst>
           </p:cNvPr>
@@ -257,7 +257,7 @@
           <a:bodyPr/>
           <a:lstStyle/>
           <a:p>
-            <a:fld id="{AE700F94-B25C-4C97-878E-27F89C4146E2}" type="datetimeFigureOut">
+            <a:fld id="{86E5C8E2-7CC4-4A62-8060-BEAF6303C999}" type="datetimeFigureOut">
               <a:rPr kumimoji="1" lang="ja-JP" altLang="en-US" smtClean="0"/>
               <a:t>2026/7/30</a:t>
             </a:fld>
@@ -270,7 +270,7 @@
           <p:cNvPr id="5" name="フッター プレースホルダー 4">
             <a:extLst>
               <a:ext uri="{FF2B5EF4-FFF2-40B4-BE49-F238E27FC236}">
-                <a16:creationId xmlns:a16="http://schemas.microsoft.com/office/drawing/2014/main" id="{F79605CB-38CB-02ED-4662-61B9AE7850B4}"/>
+                <a16:creationId xmlns:a16="http://schemas.microsoft.com/office/drawing/2014/main" id="{8B099044-1CCE-7AE9-04F3-490E3418B6AB}"/>
               </a:ext>
             </a:extLst>
           </p:cNvPr>
@@ -295,7 +295,7 @@
           <p:cNvPr id="6" name="スライド番号プレースホルダー 5">
             <a:extLst>
               <a:ext uri="{FF2B5EF4-FFF2-40B4-BE49-F238E27FC236}">
-                <a16:creationId xmlns:a16="http://schemas.microsoft.com/office/drawing/2014/main" id="{7469CB3A-1592-60B2-4D15-A05E50A02774}"/>
+                <a16:creationId xmlns:a16="http://schemas.microsoft.com/office/drawing/2014/main" id="{41471D33-D759-304C-FBD1-01C66775730E}"/>
               </a:ext>
             </a:extLst>
           </p:cNvPr>
@@ -311,7 +311,7 @@
           <a:bodyPr/>
           <a:lstStyle/>
           <a:p>
-            <a:fld id="{B390F989-64E6-41E1-9F21-7A31021B7DB0}" type="slidenum">
+            <a:fld id="{10E2B5AC-89FB-48EB-9CCF-510AF25C1A40}" type="slidenum">
               <a:rPr kumimoji="1" lang="ja-JP" altLang="en-US" smtClean="0"/>
               <a:t>‹#›</a:t>
             </a:fld>
@@ -322,7 +322,7 @@
     </p:spTree>
     <p:extLst>
       <p:ext uri="{BB962C8B-B14F-4D97-AF65-F5344CB8AC3E}">
-        <p14:creationId xmlns:p14="http://schemas.microsoft.com/office/powerpoint/2010/main" val="1279269400"/>
+        <p14:creationId xmlns:p14="http://schemas.microsoft.com/office/powerpoint/2010/main" val="239732639"/>
       </p:ext>
     </p:extLst>
   </p:cSld>
@@ -354,7 +354,7 @@
           <p:cNvPr id="2" name="タイトル 1">
             <a:extLst>
               <a:ext uri="{FF2B5EF4-FFF2-40B4-BE49-F238E27FC236}">
-                <a16:creationId xmlns:a16="http://schemas.microsoft.com/office/drawing/2014/main" id="{55FD808F-62F5-7E3C-D917-AD312EBC6EC6}"/>
+                <a16:creationId xmlns:a16="http://schemas.microsoft.com/office/drawing/2014/main" id="{75F39151-9C29-E160-468C-D0CDF43B8A83}"/>
               </a:ext>
             </a:extLst>
           </p:cNvPr>
@@ -382,7 +382,7 @@
           <p:cNvPr id="3" name="縦書きテキスト プレースホルダー 2">
             <a:extLst>
               <a:ext uri="{FF2B5EF4-FFF2-40B4-BE49-F238E27FC236}">
-                <a16:creationId xmlns:a16="http://schemas.microsoft.com/office/drawing/2014/main" id="{B59A5F4A-C516-A1BA-1C94-7DC2C218544F}"/>
+                <a16:creationId xmlns:a16="http://schemas.microsoft.com/office/drawing/2014/main" id="{8BC8CDA5-70D2-5805-80F3-A7BF93BBD20B}"/>
               </a:ext>
             </a:extLst>
           </p:cNvPr>
@@ -471,7 +471,7 @@
           <p:cNvPr id="4" name="日付プレースホルダー 3">
             <a:extLst>
               <a:ext uri="{FF2B5EF4-FFF2-40B4-BE49-F238E27FC236}">
-                <a16:creationId xmlns:a16="http://schemas.microsoft.com/office/drawing/2014/main" id="{FA618F60-686B-1BF3-A3E0-71730027A467}"/>
+                <a16:creationId xmlns:a16="http://schemas.microsoft.com/office/drawing/2014/main" id="{A4A46C29-4FBF-4208-2C91-59C65948995D}"/>
               </a:ext>
             </a:extLst>
           </p:cNvPr>
@@ -487,7 +487,7 @@
           <a:bodyPr/>
           <a:lstStyle/>
           <a:p>
-            <a:fld id="{AE700F94-B25C-4C97-878E-27F89C4146E2}" type="datetimeFigureOut">
+            <a:fld id="{86E5C8E2-7CC4-4A62-8060-BEAF6303C999}" type="datetimeFigureOut">
               <a:rPr kumimoji="1" lang="ja-JP" altLang="en-US" smtClean="0"/>
               <a:t>2026/7/30</a:t>
             </a:fld>
@@ -500,7 +500,7 @@
           <p:cNvPr id="5" name="フッター プレースホルダー 4">
             <a:extLst>
               <a:ext uri="{FF2B5EF4-FFF2-40B4-BE49-F238E27FC236}">
-                <a16:creationId xmlns:a16="http://schemas.microsoft.com/office/drawing/2014/main" id="{DBA14DA4-3AE5-7628-F440-4D2262FDE116}"/>
+                <a16:creationId xmlns:a16="http://schemas.microsoft.com/office/drawing/2014/main" id="{6D9F30FE-1BB8-69DF-CA6B-08B5E52774B1}"/>
               </a:ext>
             </a:extLst>
           </p:cNvPr>
@@ -525,7 +525,7 @@
           <p:cNvPr id="6" name="スライド番号プレースホルダー 5">
             <a:extLst>
               <a:ext uri="{FF2B5EF4-FFF2-40B4-BE49-F238E27FC236}">
-                <a16:creationId xmlns:a16="http://schemas.microsoft.com/office/drawing/2014/main" id="{00BB26EA-587E-6B1E-FBBF-FD6FF5D50519}"/>
+                <a16:creationId xmlns:a16="http://schemas.microsoft.com/office/drawing/2014/main" id="{AC351582-AEB8-A85F-2E4B-9650CF34FA68}"/>
               </a:ext>
             </a:extLst>
           </p:cNvPr>
@@ -541,7 +541,7 @@
           <a:bodyPr/>
           <a:lstStyle/>
           <a:p>
-            <a:fld id="{B390F989-64E6-41E1-9F21-7A31021B7DB0}" type="slidenum">
+            <a:fld id="{10E2B5AC-89FB-48EB-9CCF-510AF25C1A40}" type="slidenum">
               <a:rPr kumimoji="1" lang="ja-JP" altLang="en-US" smtClean="0"/>
               <a:t>‹#›</a:t>
             </a:fld>
@@ -552,7 +552,7 @@
     </p:spTree>
     <p:extLst>
       <p:ext uri="{BB962C8B-B14F-4D97-AF65-F5344CB8AC3E}">
-        <p14:creationId xmlns:p14="http://schemas.microsoft.com/office/powerpoint/2010/main" val="1983766554"/>
+        <p14:creationId xmlns:p14="http://schemas.microsoft.com/office/powerpoint/2010/main" val="19018369"/>
       </p:ext>
     </p:extLst>
   </p:cSld>
@@ -584,7 +584,7 @@
           <p:cNvPr id="2" name="縦書きタイトル 1">
             <a:extLst>
               <a:ext uri="{FF2B5EF4-FFF2-40B4-BE49-F238E27FC236}">
-                <a16:creationId xmlns:a16="http://schemas.microsoft.com/office/drawing/2014/main" id="{08B792DB-8689-AA74-5E15-79F4A3E9849D}"/>
+                <a16:creationId xmlns:a16="http://schemas.microsoft.com/office/drawing/2014/main" id="{650EBA5B-16FB-7045-6964-AB0CFCF908C9}"/>
               </a:ext>
             </a:extLst>
           </p:cNvPr>
@@ -617,7 +617,7 @@
           <p:cNvPr id="3" name="縦書きテキスト プレースホルダー 2">
             <a:extLst>
               <a:ext uri="{FF2B5EF4-FFF2-40B4-BE49-F238E27FC236}">
-                <a16:creationId xmlns:a16="http://schemas.microsoft.com/office/drawing/2014/main" id="{592055C6-0251-662F-3B72-D7F9871F6EBB}"/>
+                <a16:creationId xmlns:a16="http://schemas.microsoft.com/office/drawing/2014/main" id="{A3509A3B-0623-8AF8-9E46-3916C1398031}"/>
               </a:ext>
             </a:extLst>
           </p:cNvPr>
@@ -711,7 +711,7 @@
           <p:cNvPr id="4" name="日付プレースホルダー 3">
             <a:extLst>
               <a:ext uri="{FF2B5EF4-FFF2-40B4-BE49-F238E27FC236}">
-                <a16:creationId xmlns:a16="http://schemas.microsoft.com/office/drawing/2014/main" id="{1B8CAD2D-1561-ADDD-982D-E0A90BB54A57}"/>
+                <a16:creationId xmlns:a16="http://schemas.microsoft.com/office/drawing/2014/main" id="{CDD3992E-3F01-B441-DAA5-18046A9359E2}"/>
               </a:ext>
             </a:extLst>
           </p:cNvPr>
@@ -727,7 +727,7 @@
           <a:bodyPr/>
           <a:lstStyle/>
           <a:p>
-            <a:fld id="{AE700F94-B25C-4C97-878E-27F89C4146E2}" type="datetimeFigureOut">
+            <a:fld id="{86E5C8E2-7CC4-4A62-8060-BEAF6303C999}" type="datetimeFigureOut">
               <a:rPr kumimoji="1" lang="ja-JP" altLang="en-US" smtClean="0"/>
               <a:t>2026/7/30</a:t>
             </a:fld>
@@ -740,7 +740,7 @@
           <p:cNvPr id="5" name="フッター プレースホルダー 4">
             <a:extLst>
               <a:ext uri="{FF2B5EF4-FFF2-40B4-BE49-F238E27FC236}">
-                <a16:creationId xmlns:a16="http://schemas.microsoft.com/office/drawing/2014/main" id="{F7102331-FC65-2E77-D282-2D7362F5B857}"/>
+                <a16:creationId xmlns:a16="http://schemas.microsoft.com/office/drawing/2014/main" id="{B9146053-3DB0-4F03-FB41-20973D811AD5}"/>
               </a:ext>
             </a:extLst>
           </p:cNvPr>
@@ -765,7 +765,7 @@
           <p:cNvPr id="6" name="スライド番号プレースホルダー 5">
             <a:extLst>
               <a:ext uri="{FF2B5EF4-FFF2-40B4-BE49-F238E27FC236}">
-                <a16:creationId xmlns:a16="http://schemas.microsoft.com/office/drawing/2014/main" id="{F08CB739-8578-8C75-2496-47E41F7AAA37}"/>
+                <a16:creationId xmlns:a16="http://schemas.microsoft.com/office/drawing/2014/main" id="{B6FABD24-7FB9-1D49-3180-BB5EFB702046}"/>
               </a:ext>
             </a:extLst>
           </p:cNvPr>
@@ -781,7 +781,7 @@
           <a:bodyPr/>
           <a:lstStyle/>
           <a:p>
-            <a:fld id="{B390F989-64E6-41E1-9F21-7A31021B7DB0}" type="slidenum">
+            <a:fld id="{10E2B5AC-89FB-48EB-9CCF-510AF25C1A40}" type="slidenum">
               <a:rPr kumimoji="1" lang="ja-JP" altLang="en-US" smtClean="0"/>
               <a:t>‹#›</a:t>
             </a:fld>
@@ -792,7 +792,7 @@
     </p:spTree>
     <p:extLst>
       <p:ext uri="{BB962C8B-B14F-4D97-AF65-F5344CB8AC3E}">
-        <p14:creationId xmlns:p14="http://schemas.microsoft.com/office/powerpoint/2010/main" val="3556431001"/>
+        <p14:creationId xmlns:p14="http://schemas.microsoft.com/office/powerpoint/2010/main" val="2209829553"/>
       </p:ext>
     </p:extLst>
   </p:cSld>
@@ -824,7 +824,7 @@
           <p:cNvPr id="2" name="タイトル 1">
             <a:extLst>
               <a:ext uri="{FF2B5EF4-FFF2-40B4-BE49-F238E27FC236}">
-                <a16:creationId xmlns:a16="http://schemas.microsoft.com/office/drawing/2014/main" id="{03CE464D-1DA4-A6ED-B6A1-50C4A75C9B82}"/>
+                <a16:creationId xmlns:a16="http://schemas.microsoft.com/office/drawing/2014/main" id="{3386CE42-38DF-BEA8-B999-5C684BAD7BDA}"/>
               </a:ext>
             </a:extLst>
           </p:cNvPr>
@@ -852,7 +852,7 @@
           <p:cNvPr id="3" name="コンテンツ プレースホルダー 2">
             <a:extLst>
               <a:ext uri="{FF2B5EF4-FFF2-40B4-BE49-F238E27FC236}">
-                <a16:creationId xmlns:a16="http://schemas.microsoft.com/office/drawing/2014/main" id="{73DAA211-E237-03BB-379A-DAFB753498CF}"/>
+                <a16:creationId xmlns:a16="http://schemas.microsoft.com/office/drawing/2014/main" id="{9E42D653-7D09-CF9A-9035-8800E4A9A8AA}"/>
               </a:ext>
             </a:extLst>
           </p:cNvPr>
@@ -941,7 +941,7 @@
           <p:cNvPr id="4" name="日付プレースホルダー 3">
             <a:extLst>
               <a:ext uri="{FF2B5EF4-FFF2-40B4-BE49-F238E27FC236}">
-                <a16:creationId xmlns:a16="http://schemas.microsoft.com/office/drawing/2014/main" id="{B4A23ABF-DFA8-4793-88EB-2B61F5C5971E}"/>
+                <a16:creationId xmlns:a16="http://schemas.microsoft.com/office/drawing/2014/main" id="{936FE06A-4071-17A9-B462-38975BF05C13}"/>
               </a:ext>
             </a:extLst>
           </p:cNvPr>
@@ -957,7 +957,7 @@
           <a:bodyPr/>
           <a:lstStyle/>
           <a:p>
-            <a:fld id="{AE700F94-B25C-4C97-878E-27F89C4146E2}" type="datetimeFigureOut">
+            <a:fld id="{86E5C8E2-7CC4-4A62-8060-BEAF6303C999}" type="datetimeFigureOut">
               <a:rPr kumimoji="1" lang="ja-JP" altLang="en-US" smtClean="0"/>
               <a:t>2026/7/30</a:t>
             </a:fld>
@@ -970,7 +970,7 @@
           <p:cNvPr id="5" name="フッター プレースホルダー 4">
             <a:extLst>
               <a:ext uri="{FF2B5EF4-FFF2-40B4-BE49-F238E27FC236}">
-                <a16:creationId xmlns:a16="http://schemas.microsoft.com/office/drawing/2014/main" id="{EB5FEA4E-9240-48E8-8492-1E20228C3D45}"/>
+                <a16:creationId xmlns:a16="http://schemas.microsoft.com/office/drawing/2014/main" id="{9183B347-DE9F-AD1D-C949-F8A803E2D708}"/>
               </a:ext>
             </a:extLst>
           </p:cNvPr>
@@ -995,7 +995,7 @@
           <p:cNvPr id="6" name="スライド番号プレースホルダー 5">
             <a:extLst>
               <a:ext uri="{FF2B5EF4-FFF2-40B4-BE49-F238E27FC236}">
-                <a16:creationId xmlns:a16="http://schemas.microsoft.com/office/drawing/2014/main" id="{53DBBC68-F9AA-85AE-EE9E-B380717BFFA5}"/>
+                <a16:creationId xmlns:a16="http://schemas.microsoft.com/office/drawing/2014/main" id="{DCC2C586-0AE7-DB3D-0D52-56194C6F1C0A}"/>
               </a:ext>
             </a:extLst>
           </p:cNvPr>
@@ -1011,7 +1011,7 @@
           <a:bodyPr/>
           <a:lstStyle/>
           <a:p>
-            <a:fld id="{B390F989-64E6-41E1-9F21-7A31021B7DB0}" type="slidenum">
+            <a:fld id="{10E2B5AC-89FB-48EB-9CCF-510AF25C1A40}" type="slidenum">
               <a:rPr kumimoji="1" lang="ja-JP" altLang="en-US" smtClean="0"/>
               <a:t>‹#›</a:t>
             </a:fld>
@@ -1022,7 +1022,7 @@
     </p:spTree>
     <p:extLst>
       <p:ext uri="{BB962C8B-B14F-4D97-AF65-F5344CB8AC3E}">
-        <p14:creationId xmlns:p14="http://schemas.microsoft.com/office/powerpoint/2010/main" val="674902717"/>
+        <p14:creationId xmlns:p14="http://schemas.microsoft.com/office/powerpoint/2010/main" val="271100168"/>
       </p:ext>
     </p:extLst>
   </p:cSld>
@@ -1054,7 +1054,7 @@
           <p:cNvPr id="2" name="タイトル 1">
             <a:extLst>
               <a:ext uri="{FF2B5EF4-FFF2-40B4-BE49-F238E27FC236}">
-                <a16:creationId xmlns:a16="http://schemas.microsoft.com/office/drawing/2014/main" id="{534A0F33-BCE2-E7EC-F36C-E4957C3EAA98}"/>
+                <a16:creationId xmlns:a16="http://schemas.microsoft.com/office/drawing/2014/main" id="{1DD5D8F3-431E-0120-FA8B-76583CB8620D}"/>
               </a:ext>
             </a:extLst>
           </p:cNvPr>
@@ -1091,7 +1091,7 @@
           <p:cNvPr id="3" name="テキスト プレースホルダー 2">
             <a:extLst>
               <a:ext uri="{FF2B5EF4-FFF2-40B4-BE49-F238E27FC236}">
-                <a16:creationId xmlns:a16="http://schemas.microsoft.com/office/drawing/2014/main" id="{58F954C1-3FA5-3ACB-2BD9-76B14A47237E}"/>
+                <a16:creationId xmlns:a16="http://schemas.microsoft.com/office/drawing/2014/main" id="{2EC7D047-7571-CD2C-AA9F-58EE767E3E8F}"/>
               </a:ext>
             </a:extLst>
           </p:cNvPr>
@@ -1216,7 +1216,7 @@
           <p:cNvPr id="4" name="日付プレースホルダー 3">
             <a:extLst>
               <a:ext uri="{FF2B5EF4-FFF2-40B4-BE49-F238E27FC236}">
-                <a16:creationId xmlns:a16="http://schemas.microsoft.com/office/drawing/2014/main" id="{D5EA529B-64EE-2742-2E21-0F37BB78640B}"/>
+                <a16:creationId xmlns:a16="http://schemas.microsoft.com/office/drawing/2014/main" id="{8AA65A3B-A3FE-2F6C-BAE2-EA1566426AC9}"/>
               </a:ext>
             </a:extLst>
           </p:cNvPr>
@@ -1232,7 +1232,7 @@
           <a:bodyPr/>
           <a:lstStyle/>
           <a:p>
-            <a:fld id="{AE700F94-B25C-4C97-878E-27F89C4146E2}" type="datetimeFigureOut">
+            <a:fld id="{86E5C8E2-7CC4-4A62-8060-BEAF6303C999}" type="datetimeFigureOut">
               <a:rPr kumimoji="1" lang="ja-JP" altLang="en-US" smtClean="0"/>
               <a:t>2026/7/30</a:t>
             </a:fld>
@@ -1245,7 +1245,7 @@
           <p:cNvPr id="5" name="フッター プレースホルダー 4">
             <a:extLst>
               <a:ext uri="{FF2B5EF4-FFF2-40B4-BE49-F238E27FC236}">
-                <a16:creationId xmlns:a16="http://schemas.microsoft.com/office/drawing/2014/main" id="{20A2BD45-D032-3A57-F8D7-E28B4021F231}"/>
+                <a16:creationId xmlns:a16="http://schemas.microsoft.com/office/drawing/2014/main" id="{B68E52AC-CE1C-08EF-5144-41A1BCFBA110}"/>
               </a:ext>
             </a:extLst>
           </p:cNvPr>
@@ -1270,7 +1270,7 @@
           <p:cNvPr id="6" name="スライド番号プレースホルダー 5">
             <a:extLst>
               <a:ext uri="{FF2B5EF4-FFF2-40B4-BE49-F238E27FC236}">
-                <a16:creationId xmlns:a16="http://schemas.microsoft.com/office/drawing/2014/main" id="{CA579457-4AA4-AEE7-7243-1F48E5B32192}"/>
+                <a16:creationId xmlns:a16="http://schemas.microsoft.com/office/drawing/2014/main" id="{17A86F7A-37DA-51F1-E235-F49CB0AA301C}"/>
               </a:ext>
             </a:extLst>
           </p:cNvPr>
@@ -1286,7 +1286,7 @@
           <a:bodyPr/>
           <a:lstStyle/>
           <a:p>
-            <a:fld id="{B390F989-64E6-41E1-9F21-7A31021B7DB0}" type="slidenum">
+            <a:fld id="{10E2B5AC-89FB-48EB-9CCF-510AF25C1A40}" type="slidenum">
               <a:rPr kumimoji="1" lang="ja-JP" altLang="en-US" smtClean="0"/>
               <a:t>‹#›</a:t>
             </a:fld>
@@ -1297,7 +1297,7 @@
     </p:spTree>
     <p:extLst>
       <p:ext uri="{BB962C8B-B14F-4D97-AF65-F5344CB8AC3E}">
-        <p14:creationId xmlns:p14="http://schemas.microsoft.com/office/powerpoint/2010/main" val="2737600"/>
+        <p14:creationId xmlns:p14="http://schemas.microsoft.com/office/powerpoint/2010/main" val="1767181435"/>
       </p:ext>
     </p:extLst>
   </p:cSld>
@@ -1329,7 +1329,7 @@
           <p:cNvPr id="2" name="タイトル 1">
             <a:extLst>
               <a:ext uri="{FF2B5EF4-FFF2-40B4-BE49-F238E27FC236}">
-                <a16:creationId xmlns:a16="http://schemas.microsoft.com/office/drawing/2014/main" id="{CB909828-C442-A928-60D2-1B62E5D857C0}"/>
+                <a16:creationId xmlns:a16="http://schemas.microsoft.com/office/drawing/2014/main" id="{1C3DD71F-8867-4448-1AD3-6F0D4F4DA828}"/>
               </a:ext>
             </a:extLst>
           </p:cNvPr>
@@ -1357,7 +1357,7 @@
           <p:cNvPr id="3" name="コンテンツ プレースホルダー 2">
             <a:extLst>
               <a:ext uri="{FF2B5EF4-FFF2-40B4-BE49-F238E27FC236}">
-                <a16:creationId xmlns:a16="http://schemas.microsoft.com/office/drawing/2014/main" id="{85D4C1AE-791E-FA67-E159-025A8F222117}"/>
+                <a16:creationId xmlns:a16="http://schemas.microsoft.com/office/drawing/2014/main" id="{DE2C3D46-C656-3018-1CC1-DAC32CD506B2}"/>
               </a:ext>
             </a:extLst>
           </p:cNvPr>
@@ -1451,7 +1451,7 @@
           <p:cNvPr id="4" name="コンテンツ プレースホルダー 3">
             <a:extLst>
               <a:ext uri="{FF2B5EF4-FFF2-40B4-BE49-F238E27FC236}">
-                <a16:creationId xmlns:a16="http://schemas.microsoft.com/office/drawing/2014/main" id="{EB82969E-97B1-9FB7-231A-93C8045C0C2A}"/>
+                <a16:creationId xmlns:a16="http://schemas.microsoft.com/office/drawing/2014/main" id="{43FE781A-5446-E1DB-D6EB-9A426408448E}"/>
               </a:ext>
             </a:extLst>
           </p:cNvPr>
@@ -1545,7 +1545,7 @@
           <p:cNvPr id="5" name="日付プレースホルダー 4">
             <a:extLst>
               <a:ext uri="{FF2B5EF4-FFF2-40B4-BE49-F238E27FC236}">
-                <a16:creationId xmlns:a16="http://schemas.microsoft.com/office/drawing/2014/main" id="{1053BCD7-7F37-06EB-6B8B-3BBC9605C89C}"/>
+                <a16:creationId xmlns:a16="http://schemas.microsoft.com/office/drawing/2014/main" id="{36BA885E-87FC-5811-E88F-B36EDF37402B}"/>
               </a:ext>
             </a:extLst>
           </p:cNvPr>
@@ -1561,7 +1561,7 @@
           <a:bodyPr/>
           <a:lstStyle/>
           <a:p>
-            <a:fld id="{AE700F94-B25C-4C97-878E-27F89C4146E2}" type="datetimeFigureOut">
+            <a:fld id="{86E5C8E2-7CC4-4A62-8060-BEAF6303C999}" type="datetimeFigureOut">
               <a:rPr kumimoji="1" lang="ja-JP" altLang="en-US" smtClean="0"/>
               <a:t>2026/7/30</a:t>
             </a:fld>
@@ -1574,7 +1574,7 @@
           <p:cNvPr id="6" name="フッター プレースホルダー 5">
             <a:extLst>
               <a:ext uri="{FF2B5EF4-FFF2-40B4-BE49-F238E27FC236}">
-                <a16:creationId xmlns:a16="http://schemas.microsoft.com/office/drawing/2014/main" id="{0817AEDE-88B2-037E-772F-D3A6BF69D482}"/>
+                <a16:creationId xmlns:a16="http://schemas.microsoft.com/office/drawing/2014/main" id="{8CD386F1-5E80-3FB8-A050-2705206D9E3A}"/>
               </a:ext>
             </a:extLst>
           </p:cNvPr>
@@ -1599,7 +1599,7 @@
           <p:cNvPr id="7" name="スライド番号プレースホルダー 6">
             <a:extLst>
               <a:ext uri="{FF2B5EF4-FFF2-40B4-BE49-F238E27FC236}">
-                <a16:creationId xmlns:a16="http://schemas.microsoft.com/office/drawing/2014/main" id="{BD47BD94-5AAC-445F-3264-54A050D1A240}"/>
+                <a16:creationId xmlns:a16="http://schemas.microsoft.com/office/drawing/2014/main" id="{D95209EC-C174-8FCF-2061-7111DB08C41F}"/>
               </a:ext>
             </a:extLst>
           </p:cNvPr>
@@ -1615,7 +1615,7 @@
           <a:bodyPr/>
           <a:lstStyle/>
           <a:p>
-            <a:fld id="{B390F989-64E6-41E1-9F21-7A31021B7DB0}" type="slidenum">
+            <a:fld id="{10E2B5AC-89FB-48EB-9CCF-510AF25C1A40}" type="slidenum">
               <a:rPr kumimoji="1" lang="ja-JP" altLang="en-US" smtClean="0"/>
               <a:t>‹#›</a:t>
             </a:fld>
@@ -1626,7 +1626,7 @@
     </p:spTree>
     <p:extLst>
       <p:ext uri="{BB962C8B-B14F-4D97-AF65-F5344CB8AC3E}">
-        <p14:creationId xmlns:p14="http://schemas.microsoft.com/office/powerpoint/2010/main" val="2963131252"/>
+        <p14:creationId xmlns:p14="http://schemas.microsoft.com/office/powerpoint/2010/main" val="1667178505"/>
       </p:ext>
     </p:extLst>
   </p:cSld>
@@ -1658,7 +1658,7 @@
           <p:cNvPr id="2" name="タイトル 1">
             <a:extLst>
               <a:ext uri="{FF2B5EF4-FFF2-40B4-BE49-F238E27FC236}">
-                <a16:creationId xmlns:a16="http://schemas.microsoft.com/office/drawing/2014/main" id="{146E4B75-76C8-AE39-3003-932CDAD39A3C}"/>
+                <a16:creationId xmlns:a16="http://schemas.microsoft.com/office/drawing/2014/main" id="{56EA9587-FFAF-0EAC-2B90-1F6C256F1D3E}"/>
               </a:ext>
             </a:extLst>
           </p:cNvPr>
@@ -1691,7 +1691,7 @@
           <p:cNvPr id="3" name="テキスト プレースホルダー 2">
             <a:extLst>
               <a:ext uri="{FF2B5EF4-FFF2-40B4-BE49-F238E27FC236}">
-                <a16:creationId xmlns:a16="http://schemas.microsoft.com/office/drawing/2014/main" id="{7231A6A8-95FD-1956-DF42-8488906B9AD1}"/>
+                <a16:creationId xmlns:a16="http://schemas.microsoft.com/office/drawing/2014/main" id="{C06893E0-2C10-15C2-3EFD-7F6C38B15419}"/>
               </a:ext>
             </a:extLst>
           </p:cNvPr>
@@ -1762,7 +1762,7 @@
           <p:cNvPr id="4" name="コンテンツ プレースホルダー 3">
             <a:extLst>
               <a:ext uri="{FF2B5EF4-FFF2-40B4-BE49-F238E27FC236}">
-                <a16:creationId xmlns:a16="http://schemas.microsoft.com/office/drawing/2014/main" id="{DF1CD932-5960-578A-BAD2-A52D6549C1F4}"/>
+                <a16:creationId xmlns:a16="http://schemas.microsoft.com/office/drawing/2014/main" id="{914995A3-D47D-207D-BB7E-29BE4835A5AE}"/>
               </a:ext>
             </a:extLst>
           </p:cNvPr>
@@ -1856,7 +1856,7 @@
           <p:cNvPr id="5" name="テキスト プレースホルダー 4">
             <a:extLst>
               <a:ext uri="{FF2B5EF4-FFF2-40B4-BE49-F238E27FC236}">
-                <a16:creationId xmlns:a16="http://schemas.microsoft.com/office/drawing/2014/main" id="{D012EF74-1057-4AC1-5E50-3D4437BBCEEC}"/>
+                <a16:creationId xmlns:a16="http://schemas.microsoft.com/office/drawing/2014/main" id="{3B7ABD24-C5A5-E347-661C-17A9C0E2A85E}"/>
               </a:ext>
             </a:extLst>
           </p:cNvPr>
@@ -1927,7 +1927,7 @@
           <p:cNvPr id="6" name="コンテンツ プレースホルダー 5">
             <a:extLst>
               <a:ext uri="{FF2B5EF4-FFF2-40B4-BE49-F238E27FC236}">
-                <a16:creationId xmlns:a16="http://schemas.microsoft.com/office/drawing/2014/main" id="{33071B2D-907C-6305-0C34-0E0692833FAD}"/>
+                <a16:creationId xmlns:a16="http://schemas.microsoft.com/office/drawing/2014/main" id="{8268FB90-8320-F3EB-C388-60CCB2206557}"/>
               </a:ext>
             </a:extLst>
           </p:cNvPr>
@@ -2021,7 +2021,7 @@
           <p:cNvPr id="7" name="日付プレースホルダー 6">
             <a:extLst>
               <a:ext uri="{FF2B5EF4-FFF2-40B4-BE49-F238E27FC236}">
-                <a16:creationId xmlns:a16="http://schemas.microsoft.com/office/drawing/2014/main" id="{EEFD2F7D-245C-9D68-597D-80BFEB22150A}"/>
+                <a16:creationId xmlns:a16="http://schemas.microsoft.com/office/drawing/2014/main" id="{CB7A87B4-EB70-32E5-1392-E32F7D50E239}"/>
               </a:ext>
             </a:extLst>
           </p:cNvPr>
@@ -2037,7 +2037,7 @@
           <a:bodyPr/>
           <a:lstStyle/>
           <a:p>
-            <a:fld id="{AE700F94-B25C-4C97-878E-27F89C4146E2}" type="datetimeFigureOut">
+            <a:fld id="{86E5C8E2-7CC4-4A62-8060-BEAF6303C999}" type="datetimeFigureOut">
               <a:rPr kumimoji="1" lang="ja-JP" altLang="en-US" smtClean="0"/>
               <a:t>2026/7/30</a:t>
             </a:fld>
@@ -2050,7 +2050,7 @@
           <p:cNvPr id="8" name="フッター プレースホルダー 7">
             <a:extLst>
               <a:ext uri="{FF2B5EF4-FFF2-40B4-BE49-F238E27FC236}">
-                <a16:creationId xmlns:a16="http://schemas.microsoft.com/office/drawing/2014/main" id="{F16F2FB2-468A-4C12-D746-3CDA9B5A34CB}"/>
+                <a16:creationId xmlns:a16="http://schemas.microsoft.com/office/drawing/2014/main" id="{B256C973-42B7-281B-6039-0A68EBED0190}"/>
               </a:ext>
             </a:extLst>
           </p:cNvPr>
@@ -2075,7 +2075,7 @@
           <p:cNvPr id="9" name="スライド番号プレースホルダー 8">
             <a:extLst>
               <a:ext uri="{FF2B5EF4-FFF2-40B4-BE49-F238E27FC236}">
-                <a16:creationId xmlns:a16="http://schemas.microsoft.com/office/drawing/2014/main" id="{E7437572-247D-2FFB-DBDA-33B6AFEB34CF}"/>
+                <a16:creationId xmlns:a16="http://schemas.microsoft.com/office/drawing/2014/main" id="{8DC0D415-AD1F-0FC5-2F74-4F23C6706EDF}"/>
               </a:ext>
             </a:extLst>
           </p:cNvPr>
@@ -2091,7 +2091,7 @@
           <a:bodyPr/>
           <a:lstStyle/>
           <a:p>
-            <a:fld id="{B390F989-64E6-41E1-9F21-7A31021B7DB0}" type="slidenum">
+            <a:fld id="{10E2B5AC-89FB-48EB-9CCF-510AF25C1A40}" type="slidenum">
               <a:rPr kumimoji="1" lang="ja-JP" altLang="en-US" smtClean="0"/>
               <a:t>‹#›</a:t>
             </a:fld>
@@ -2102,7 +2102,7 @@
     </p:spTree>
     <p:extLst>
       <p:ext uri="{BB962C8B-B14F-4D97-AF65-F5344CB8AC3E}">
-        <p14:creationId xmlns:p14="http://schemas.microsoft.com/office/powerpoint/2010/main" val="2048894392"/>
+        <p14:creationId xmlns:p14="http://schemas.microsoft.com/office/powerpoint/2010/main" val="3551159400"/>
       </p:ext>
     </p:extLst>
   </p:cSld>
@@ -2134,7 +2134,7 @@
           <p:cNvPr id="2" name="タイトル 1">
             <a:extLst>
               <a:ext uri="{FF2B5EF4-FFF2-40B4-BE49-F238E27FC236}">
-                <a16:creationId xmlns:a16="http://schemas.microsoft.com/office/drawing/2014/main" id="{591C5EB4-527D-0E59-2368-DDAEBA1A915B}"/>
+                <a16:creationId xmlns:a16="http://schemas.microsoft.com/office/drawing/2014/main" id="{1F02A749-AADB-6E3A-699A-284D442F9BB6}"/>
               </a:ext>
             </a:extLst>
           </p:cNvPr>
@@ -2162,7 +2162,7 @@
           <p:cNvPr id="3" name="日付プレースホルダー 2">
             <a:extLst>
               <a:ext uri="{FF2B5EF4-FFF2-40B4-BE49-F238E27FC236}">
-                <a16:creationId xmlns:a16="http://schemas.microsoft.com/office/drawing/2014/main" id="{01D085E6-0106-A6F1-17E8-F729D9895747}"/>
+                <a16:creationId xmlns:a16="http://schemas.microsoft.com/office/drawing/2014/main" id="{C2F35868-0BC8-9A6D-5E6A-86F70F183F64}"/>
               </a:ext>
             </a:extLst>
           </p:cNvPr>
@@ -2178,7 +2178,7 @@
           <a:bodyPr/>
           <a:lstStyle/>
           <a:p>
-            <a:fld id="{AE700F94-B25C-4C97-878E-27F89C4146E2}" type="datetimeFigureOut">
+            <a:fld id="{86E5C8E2-7CC4-4A62-8060-BEAF6303C999}" type="datetimeFigureOut">
               <a:rPr kumimoji="1" lang="ja-JP" altLang="en-US" smtClean="0"/>
               <a:t>2026/7/30</a:t>
             </a:fld>
@@ -2191,7 +2191,7 @@
           <p:cNvPr id="4" name="フッター プレースホルダー 3">
             <a:extLst>
               <a:ext uri="{FF2B5EF4-FFF2-40B4-BE49-F238E27FC236}">
-                <a16:creationId xmlns:a16="http://schemas.microsoft.com/office/drawing/2014/main" id="{29AAA205-7AED-903A-5797-9435FC9B5FA1}"/>
+                <a16:creationId xmlns:a16="http://schemas.microsoft.com/office/drawing/2014/main" id="{10E671A8-A0BC-8CE4-37EA-31FCFB13D664}"/>
               </a:ext>
             </a:extLst>
           </p:cNvPr>
@@ -2216,7 +2216,7 @@
           <p:cNvPr id="5" name="スライド番号プレースホルダー 4">
             <a:extLst>
               <a:ext uri="{FF2B5EF4-FFF2-40B4-BE49-F238E27FC236}">
-                <a16:creationId xmlns:a16="http://schemas.microsoft.com/office/drawing/2014/main" id="{17B8A859-F3FB-228E-826E-3AB19E6B48CE}"/>
+                <a16:creationId xmlns:a16="http://schemas.microsoft.com/office/drawing/2014/main" id="{1B474696-9010-AB43-1483-4DEB8B16A691}"/>
               </a:ext>
             </a:extLst>
           </p:cNvPr>
@@ -2232,7 +2232,7 @@
           <a:bodyPr/>
           <a:lstStyle/>
           <a:p>
-            <a:fld id="{B390F989-64E6-41E1-9F21-7A31021B7DB0}" type="slidenum">
+            <a:fld id="{10E2B5AC-89FB-48EB-9CCF-510AF25C1A40}" type="slidenum">
               <a:rPr kumimoji="1" lang="ja-JP" altLang="en-US" smtClean="0"/>
               <a:t>‹#›</a:t>
             </a:fld>
@@ -2243,7 +2243,7 @@
     </p:spTree>
     <p:extLst>
       <p:ext uri="{BB962C8B-B14F-4D97-AF65-F5344CB8AC3E}">
-        <p14:creationId xmlns:p14="http://schemas.microsoft.com/office/powerpoint/2010/main" val="4132341170"/>
+        <p14:creationId xmlns:p14="http://schemas.microsoft.com/office/powerpoint/2010/main" val="2153735072"/>
       </p:ext>
     </p:extLst>
   </p:cSld>
@@ -2275,7 +2275,7 @@
           <p:cNvPr id="2" name="日付プレースホルダー 1">
             <a:extLst>
               <a:ext uri="{FF2B5EF4-FFF2-40B4-BE49-F238E27FC236}">
-                <a16:creationId xmlns:a16="http://schemas.microsoft.com/office/drawing/2014/main" id="{2E9F2D71-9838-6279-7A19-A7FF497CE8DF}"/>
+                <a16:creationId xmlns:a16="http://schemas.microsoft.com/office/drawing/2014/main" id="{C4CD5080-BC1F-03B6-CAA3-675AEE0A67E5}"/>
               </a:ext>
             </a:extLst>
           </p:cNvPr>
@@ -2291,7 +2291,7 @@
           <a:bodyPr/>
           <a:lstStyle/>
           <a:p>
-            <a:fld id="{AE700F94-B25C-4C97-878E-27F89C4146E2}" type="datetimeFigureOut">
+            <a:fld id="{86E5C8E2-7CC4-4A62-8060-BEAF6303C999}" type="datetimeFigureOut">
               <a:rPr kumimoji="1" lang="ja-JP" altLang="en-US" smtClean="0"/>
               <a:t>2026/7/30</a:t>
             </a:fld>
@@ -2304,7 +2304,7 @@
           <p:cNvPr id="3" name="フッター プレースホルダー 2">
             <a:extLst>
               <a:ext uri="{FF2B5EF4-FFF2-40B4-BE49-F238E27FC236}">
-                <a16:creationId xmlns:a16="http://schemas.microsoft.com/office/drawing/2014/main" id="{806AADCB-942F-C307-7EEA-332DFA0C3DAF}"/>
+                <a16:creationId xmlns:a16="http://schemas.microsoft.com/office/drawing/2014/main" id="{163090C8-643C-3219-A620-4221AC5B312E}"/>
               </a:ext>
             </a:extLst>
           </p:cNvPr>
@@ -2329,7 +2329,7 @@
           <p:cNvPr id="4" name="スライド番号プレースホルダー 3">
             <a:extLst>
               <a:ext uri="{FF2B5EF4-FFF2-40B4-BE49-F238E27FC236}">
-                <a16:creationId xmlns:a16="http://schemas.microsoft.com/office/drawing/2014/main" id="{328558BE-8F26-21CB-D9C3-F88AF8B915D8}"/>
+                <a16:creationId xmlns:a16="http://schemas.microsoft.com/office/drawing/2014/main" id="{0477BF6B-B0AB-0405-A046-D6B14F3111C7}"/>
               </a:ext>
             </a:extLst>
           </p:cNvPr>
@@ -2345,7 +2345,7 @@
           <a:bodyPr/>
           <a:lstStyle/>
           <a:p>
-            <a:fld id="{B390F989-64E6-41E1-9F21-7A31021B7DB0}" type="slidenum">
+            <a:fld id="{10E2B5AC-89FB-48EB-9CCF-510AF25C1A40}" type="slidenum">
               <a:rPr kumimoji="1" lang="ja-JP" altLang="en-US" smtClean="0"/>
               <a:t>‹#›</a:t>
             </a:fld>
@@ -2356,7 +2356,7 @@
     </p:spTree>
     <p:extLst>
       <p:ext uri="{BB962C8B-B14F-4D97-AF65-F5344CB8AC3E}">
-        <p14:creationId xmlns:p14="http://schemas.microsoft.com/office/powerpoint/2010/main" val="3119027293"/>
+        <p14:creationId xmlns:p14="http://schemas.microsoft.com/office/powerpoint/2010/main" val="624326403"/>
       </p:ext>
     </p:extLst>
   </p:cSld>
@@ -2388,7 +2388,7 @@
           <p:cNvPr id="2" name="タイトル 1">
             <a:extLst>
               <a:ext uri="{FF2B5EF4-FFF2-40B4-BE49-F238E27FC236}">
-                <a16:creationId xmlns:a16="http://schemas.microsoft.com/office/drawing/2014/main" id="{B697A9A7-A991-D296-F26A-B2840B9E6334}"/>
+                <a16:creationId xmlns:a16="http://schemas.microsoft.com/office/drawing/2014/main" id="{F748F55A-6303-6F8F-3A86-678F0A69B080}"/>
               </a:ext>
             </a:extLst>
           </p:cNvPr>
@@ -2425,7 +2425,7 @@
           <p:cNvPr id="3" name="コンテンツ プレースホルダー 2">
             <a:extLst>
               <a:ext uri="{FF2B5EF4-FFF2-40B4-BE49-F238E27FC236}">
-                <a16:creationId xmlns:a16="http://schemas.microsoft.com/office/drawing/2014/main" id="{2AEC5A34-D01D-1510-3B43-5D87D09D6AAD}"/>
+                <a16:creationId xmlns:a16="http://schemas.microsoft.com/office/drawing/2014/main" id="{7FBD5F5A-CAE9-B64C-8CC2-9EB12812AE1A}"/>
               </a:ext>
             </a:extLst>
           </p:cNvPr>
@@ -2547,7 +2547,7 @@
           <p:cNvPr id="4" name="テキスト プレースホルダー 3">
             <a:extLst>
               <a:ext uri="{FF2B5EF4-FFF2-40B4-BE49-F238E27FC236}">
-                <a16:creationId xmlns:a16="http://schemas.microsoft.com/office/drawing/2014/main" id="{D7D6A3E5-DDA1-BC2C-A12D-095BEC3FFFBF}"/>
+                <a16:creationId xmlns:a16="http://schemas.microsoft.com/office/drawing/2014/main" id="{17E83FC4-B519-DBE2-BC46-5EB754014FE6}"/>
               </a:ext>
             </a:extLst>
           </p:cNvPr>
@@ -2618,7 +2618,7 @@
           <p:cNvPr id="5" name="日付プレースホルダー 4">
             <a:extLst>
               <a:ext uri="{FF2B5EF4-FFF2-40B4-BE49-F238E27FC236}">
-                <a16:creationId xmlns:a16="http://schemas.microsoft.com/office/drawing/2014/main" id="{544530A4-08E6-D5E1-F37C-CBA630B16D9B}"/>
+                <a16:creationId xmlns:a16="http://schemas.microsoft.com/office/drawing/2014/main" id="{F3D1CD31-DE60-83FE-8A57-C6A0C5FF2FE8}"/>
               </a:ext>
             </a:extLst>
           </p:cNvPr>
@@ -2634,7 +2634,7 @@
           <a:bodyPr/>
           <a:lstStyle/>
           <a:p>
-            <a:fld id="{AE700F94-B25C-4C97-878E-27F89C4146E2}" type="datetimeFigureOut">
+            <a:fld id="{86E5C8E2-7CC4-4A62-8060-BEAF6303C999}" type="datetimeFigureOut">
               <a:rPr kumimoji="1" lang="ja-JP" altLang="en-US" smtClean="0"/>
               <a:t>2026/7/30</a:t>
             </a:fld>
@@ -2647,7 +2647,7 @@
           <p:cNvPr id="6" name="フッター プレースホルダー 5">
             <a:extLst>
               <a:ext uri="{FF2B5EF4-FFF2-40B4-BE49-F238E27FC236}">
-                <a16:creationId xmlns:a16="http://schemas.microsoft.com/office/drawing/2014/main" id="{C12B5AA9-0218-8214-BC39-6567FC022D67}"/>
+                <a16:creationId xmlns:a16="http://schemas.microsoft.com/office/drawing/2014/main" id="{5D105DA1-B6A9-6863-96E7-D81BD3D2AC31}"/>
               </a:ext>
             </a:extLst>
           </p:cNvPr>
@@ -2672,7 +2672,7 @@
           <p:cNvPr id="7" name="スライド番号プレースホルダー 6">
             <a:extLst>
               <a:ext uri="{FF2B5EF4-FFF2-40B4-BE49-F238E27FC236}">
-                <a16:creationId xmlns:a16="http://schemas.microsoft.com/office/drawing/2014/main" id="{E60B5237-CC4B-5443-F7E0-353F55C57FD3}"/>
+                <a16:creationId xmlns:a16="http://schemas.microsoft.com/office/drawing/2014/main" id="{0904A69F-E757-9416-674D-11C6371FB628}"/>
               </a:ext>
             </a:extLst>
           </p:cNvPr>
@@ -2688,7 +2688,7 @@
           <a:bodyPr/>
           <a:lstStyle/>
           <a:p>
-            <a:fld id="{B390F989-64E6-41E1-9F21-7A31021B7DB0}" type="slidenum">
+            <a:fld id="{10E2B5AC-89FB-48EB-9CCF-510AF25C1A40}" type="slidenum">
               <a:rPr kumimoji="1" lang="ja-JP" altLang="en-US" smtClean="0"/>
               <a:t>‹#›</a:t>
             </a:fld>
@@ -2699,7 +2699,7 @@
     </p:spTree>
     <p:extLst>
       <p:ext uri="{BB962C8B-B14F-4D97-AF65-F5344CB8AC3E}">
-        <p14:creationId xmlns:p14="http://schemas.microsoft.com/office/powerpoint/2010/main" val="1016138394"/>
+        <p14:creationId xmlns:p14="http://schemas.microsoft.com/office/powerpoint/2010/main" val="1223275251"/>
       </p:ext>
     </p:extLst>
   </p:cSld>
@@ -2731,7 +2731,7 @@
           <p:cNvPr id="2" name="タイトル 1">
             <a:extLst>
               <a:ext uri="{FF2B5EF4-FFF2-40B4-BE49-F238E27FC236}">
-                <a16:creationId xmlns:a16="http://schemas.microsoft.com/office/drawing/2014/main" id="{F5C46164-1265-2B6F-1F25-33DC9B8A9CD1}"/>
+                <a16:creationId xmlns:a16="http://schemas.microsoft.com/office/drawing/2014/main" id="{0DD0A34A-88EF-6B85-F972-084BA6359EEA}"/>
               </a:ext>
             </a:extLst>
           </p:cNvPr>
@@ -2768,7 +2768,7 @@
           <p:cNvPr id="3" name="図プレースホルダー 2">
             <a:extLst>
               <a:ext uri="{FF2B5EF4-FFF2-40B4-BE49-F238E27FC236}">
-                <a16:creationId xmlns:a16="http://schemas.microsoft.com/office/drawing/2014/main" id="{218C77B7-7BDA-368E-D47D-46891F0C79DC}"/>
+                <a16:creationId xmlns:a16="http://schemas.microsoft.com/office/drawing/2014/main" id="{91A0E0DC-9ABB-FD7D-D729-C5D933B6EDEB}"/>
               </a:ext>
             </a:extLst>
           </p:cNvPr>
@@ -2835,7 +2835,7 @@
           <p:cNvPr id="4" name="テキスト プレースホルダー 3">
             <a:extLst>
               <a:ext uri="{FF2B5EF4-FFF2-40B4-BE49-F238E27FC236}">
-                <a16:creationId xmlns:a16="http://schemas.microsoft.com/office/drawing/2014/main" id="{BDD9F403-E46F-BEDF-525C-9997B344CE47}"/>
+                <a16:creationId xmlns:a16="http://schemas.microsoft.com/office/drawing/2014/main" id="{A196465B-206A-E90A-961F-66D3ED79C80E}"/>
               </a:ext>
             </a:extLst>
           </p:cNvPr>
@@ -2906,7 +2906,7 @@
           <p:cNvPr id="5" name="日付プレースホルダー 4">
             <a:extLst>
               <a:ext uri="{FF2B5EF4-FFF2-40B4-BE49-F238E27FC236}">
-                <a16:creationId xmlns:a16="http://schemas.microsoft.com/office/drawing/2014/main" id="{D9E04AD6-6FD1-D958-B1DD-823FAB8580C4}"/>
+                <a16:creationId xmlns:a16="http://schemas.microsoft.com/office/drawing/2014/main" id="{935950BE-4E67-D026-89F8-6782F6351B12}"/>
               </a:ext>
             </a:extLst>
           </p:cNvPr>
@@ -2922,7 +2922,7 @@
           <a:bodyPr/>
           <a:lstStyle/>
           <a:p>
-            <a:fld id="{AE700F94-B25C-4C97-878E-27F89C4146E2}" type="datetimeFigureOut">
+            <a:fld id="{86E5C8E2-7CC4-4A62-8060-BEAF6303C999}" type="datetimeFigureOut">
               <a:rPr kumimoji="1" lang="ja-JP" altLang="en-US" smtClean="0"/>
               <a:t>2026/7/30</a:t>
             </a:fld>
@@ -2935,7 +2935,7 @@
           <p:cNvPr id="6" name="フッター プレースホルダー 5">
             <a:extLst>
               <a:ext uri="{FF2B5EF4-FFF2-40B4-BE49-F238E27FC236}">
-                <a16:creationId xmlns:a16="http://schemas.microsoft.com/office/drawing/2014/main" id="{87C50AFE-89EB-8BCE-ABEB-DCA8B2303299}"/>
+                <a16:creationId xmlns:a16="http://schemas.microsoft.com/office/drawing/2014/main" id="{EF13715C-823A-7C5E-9F5B-E7EE84C6CEE6}"/>
               </a:ext>
             </a:extLst>
           </p:cNvPr>
@@ -2960,7 +2960,7 @@
           <p:cNvPr id="7" name="スライド番号プレースホルダー 6">
             <a:extLst>
               <a:ext uri="{FF2B5EF4-FFF2-40B4-BE49-F238E27FC236}">
-                <a16:creationId xmlns:a16="http://schemas.microsoft.com/office/drawing/2014/main" id="{8EC014CC-CF31-60E1-D78D-DDA91CBADC34}"/>
+                <a16:creationId xmlns:a16="http://schemas.microsoft.com/office/drawing/2014/main" id="{70A3BAB1-B099-A7A3-45D6-CDBF7AD5A419}"/>
               </a:ext>
             </a:extLst>
           </p:cNvPr>
@@ -2976,7 +2976,7 @@
           <a:bodyPr/>
           <a:lstStyle/>
           <a:p>
-            <a:fld id="{B390F989-64E6-41E1-9F21-7A31021B7DB0}" type="slidenum">
+            <a:fld id="{10E2B5AC-89FB-48EB-9CCF-510AF25C1A40}" type="slidenum">
               <a:rPr kumimoji="1" lang="ja-JP" altLang="en-US" smtClean="0"/>
               <a:t>‹#›</a:t>
             </a:fld>
@@ -2987,7 +2987,7 @@
     </p:spTree>
     <p:extLst>
       <p:ext uri="{BB962C8B-B14F-4D97-AF65-F5344CB8AC3E}">
-        <p14:creationId xmlns:p14="http://schemas.microsoft.com/office/powerpoint/2010/main" val="3812418796"/>
+        <p14:creationId xmlns:p14="http://schemas.microsoft.com/office/powerpoint/2010/main" val="2683127156"/>
       </p:ext>
     </p:extLst>
   </p:cSld>
@@ -3024,7 +3024,7 @@
           <p:cNvPr id="2" name="タイトル プレースホルダー 1">
             <a:extLst>
               <a:ext uri="{FF2B5EF4-FFF2-40B4-BE49-F238E27FC236}">
-                <a16:creationId xmlns:a16="http://schemas.microsoft.com/office/drawing/2014/main" id="{3F01C2A4-52B5-4C13-5157-EAA83070F518}"/>
+                <a16:creationId xmlns:a16="http://schemas.microsoft.com/office/drawing/2014/main" id="{79407B66-DF99-335F-319E-9EE1C4897F95}"/>
               </a:ext>
             </a:extLst>
           </p:cNvPr>
@@ -3062,7 +3062,7 @@
           <p:cNvPr id="3" name="テキスト プレースホルダー 2">
             <a:extLst>
               <a:ext uri="{FF2B5EF4-FFF2-40B4-BE49-F238E27FC236}">
-                <a16:creationId xmlns:a16="http://schemas.microsoft.com/office/drawing/2014/main" id="{D08F37D3-3CF9-31AF-2E34-4B9A9EA9E226}"/>
+                <a16:creationId xmlns:a16="http://schemas.microsoft.com/office/drawing/2014/main" id="{C7186CF4-F0A9-581E-1D15-12F49785FD1B}"/>
               </a:ext>
             </a:extLst>
           </p:cNvPr>
@@ -3161,7 +3161,7 @@
           <p:cNvPr id="4" name="日付プレースホルダー 3">
             <a:extLst>
               <a:ext uri="{FF2B5EF4-FFF2-40B4-BE49-F238E27FC236}">
-                <a16:creationId xmlns:a16="http://schemas.microsoft.com/office/drawing/2014/main" id="{B3046414-1D05-F2BE-D5D1-071159B046BC}"/>
+                <a16:creationId xmlns:a16="http://schemas.microsoft.com/office/drawing/2014/main" id="{48182746-7CFB-D71F-92AD-AFCBF8F6B594}"/>
               </a:ext>
             </a:extLst>
           </p:cNvPr>
@@ -3195,7 +3195,7 @@
             </a:lvl1pPr>
           </a:lstStyle>
           <a:p>
-            <a:fld id="{AE700F94-B25C-4C97-878E-27F89C4146E2}" type="datetimeFigureOut">
+            <a:fld id="{86E5C8E2-7CC4-4A62-8060-BEAF6303C999}" type="datetimeFigureOut">
               <a:rPr kumimoji="1" lang="ja-JP" altLang="en-US" smtClean="0"/>
               <a:t>2026/7/30</a:t>
             </a:fld>
@@ -3208,7 +3208,7 @@
           <p:cNvPr id="5" name="フッター プレースホルダー 4">
             <a:extLst>
               <a:ext uri="{FF2B5EF4-FFF2-40B4-BE49-F238E27FC236}">
-                <a16:creationId xmlns:a16="http://schemas.microsoft.com/office/drawing/2014/main" id="{81405701-8149-0AAF-FA15-CAA3D715BB1E}"/>
+                <a16:creationId xmlns:a16="http://schemas.microsoft.com/office/drawing/2014/main" id="{A99AE6DF-F0A0-DDCD-8404-18B4C0A876AC}"/>
               </a:ext>
             </a:extLst>
           </p:cNvPr>
@@ -3251,7 +3251,7 @@
           <p:cNvPr id="6" name="スライド番号プレースホルダー 5">
             <a:extLst>
               <a:ext uri="{FF2B5EF4-FFF2-40B4-BE49-F238E27FC236}">
-                <a16:creationId xmlns:a16="http://schemas.microsoft.com/office/drawing/2014/main" id="{CA801485-0D5E-1AFE-DD2E-DC62E9CAAC8C}"/>
+                <a16:creationId xmlns:a16="http://schemas.microsoft.com/office/drawing/2014/main" id="{642FC4C1-4F93-1F38-8788-1060CC452A5D}"/>
               </a:ext>
             </a:extLst>
           </p:cNvPr>
@@ -3285,7 +3285,7 @@
             </a:lvl1pPr>
           </a:lstStyle>
           <a:p>
-            <a:fld id="{B390F989-64E6-41E1-9F21-7A31021B7DB0}" type="slidenum">
+            <a:fld id="{10E2B5AC-89FB-48EB-9CCF-510AF25C1A40}" type="slidenum">
               <a:rPr kumimoji="1" lang="ja-JP" altLang="en-US" smtClean="0"/>
               <a:t>‹#›</a:t>
             </a:fld>
@@ -3296,7 +3296,7 @@
     </p:spTree>
     <p:extLst>
       <p:ext uri="{BB962C8B-B14F-4D97-AF65-F5344CB8AC3E}">
-        <p14:creationId xmlns:p14="http://schemas.microsoft.com/office/powerpoint/2010/main" val="2568865955"/>
+        <p14:creationId xmlns:p14="http://schemas.microsoft.com/office/powerpoint/2010/main" val="2966917628"/>
       </p:ext>
     </p:extLst>
   </p:cSld>
@@ -3619,7 +3619,7 @@
           <p:cNvPr id="2" name="テキスト ボックス 1">
             <a:extLst>
               <a:ext uri="{FF2B5EF4-FFF2-40B4-BE49-F238E27FC236}">
-                <a16:creationId xmlns:a16="http://schemas.microsoft.com/office/drawing/2014/main" id="{88A9B2AD-30E0-B023-1B4B-59428B4AAC4B}"/>
+                <a16:creationId xmlns:a16="http://schemas.microsoft.com/office/drawing/2014/main" id="{4657561A-B0E0-CD13-24AC-67630F609525}"/>
               </a:ext>
             </a:extLst>
           </p:cNvPr>
@@ -3665,7 +3665,7 @@
           <p:cNvPr id="3" name="テキスト ボックス 2">
             <a:extLst>
               <a:ext uri="{FF2B5EF4-FFF2-40B4-BE49-F238E27FC236}">
-                <a16:creationId xmlns:a16="http://schemas.microsoft.com/office/drawing/2014/main" id="{12E2BEF8-8439-6788-AA54-70BE081EC98B}"/>
+                <a16:creationId xmlns:a16="http://schemas.microsoft.com/office/drawing/2014/main" id="{E56420BF-EFCB-DB8A-D9BB-A6D90FB6DD5D}"/>
               </a:ext>
             </a:extLst>
           </p:cNvPr>
@@ -3695,14 +3695,17 @@
                 </a:solidFill>
                 <a:latin typeface="Arial" panose="020B0604020202020204" pitchFamily="34" charset="0"/>
               </a:rPr>
-              <a:t>autohensei TECH EXPLANATION</a:t>
-            </a:r>
-            <a:endParaRPr kumimoji="1" lang="ja-JP" altLang="en-US" sz="3400" b="1">
-              <a:solidFill>
-                <a:srgbClr val="111111"/>
-              </a:solidFill>
-              <a:latin typeface="Arial" panose="020B0604020202020204" pitchFamily="34" charset="0"/>
-            </a:endParaRPr>
+              <a:t>Autohensei</a:t>
+            </a:r>
+            <a:r>
+              <a:rPr kumimoji="1" lang="ja-JP" altLang="en-US" sz="3400" b="1">
+                <a:solidFill>
+                  <a:srgbClr val="111111"/>
+                </a:solidFill>
+                <a:latin typeface="Arial" panose="020B0604020202020204" pitchFamily="34" charset="0"/>
+              </a:rPr>
+              <a:t>の技術解説</a:t>
+            </a:r>
           </a:p>
         </p:txBody>
       </p:sp>
@@ -3711,7 +3714,7 @@
           <p:cNvPr id="4" name="テキスト ボックス 3">
             <a:extLst>
               <a:ext uri="{FF2B5EF4-FFF2-40B4-BE49-F238E27FC236}">
-                <a16:creationId xmlns:a16="http://schemas.microsoft.com/office/drawing/2014/main" id="{6989206B-A61F-335E-8390-42BB26DBFD9D}"/>
+                <a16:creationId xmlns:a16="http://schemas.microsoft.com/office/drawing/2014/main" id="{CEB5C507-E188-4A18-5F04-76EE0CF36F75}"/>
               </a:ext>
             </a:extLst>
           </p:cNvPr>
@@ -3735,20 +3738,14 @@
           <a:lstStyle/>
           <a:p>
             <a:r>
-              <a:rPr kumimoji="1" lang="en-US" altLang="ja-JP" sz="2000">
+              <a:rPr kumimoji="1" lang="ja-JP" altLang="en-US" sz="2000">
                 <a:solidFill>
                   <a:srgbClr val="333333"/>
                 </a:solidFill>
                 <a:latin typeface="Arial" panose="020B0604020202020204" pitchFamily="34" charset="0"/>
               </a:rPr>
-              <a:t>Architecture, implementation and commit history in 75 seconds</a:t>
-            </a:r>
-            <a:endParaRPr kumimoji="1" lang="ja-JP" altLang="en-US" sz="2000">
-              <a:solidFill>
-                <a:srgbClr val="333333"/>
-              </a:solidFill>
-              <a:latin typeface="Arial" panose="020B0604020202020204" pitchFamily="34" charset="0"/>
-            </a:endParaRPr>
+              <a:t>設計・実装・コミットから学ぶ短時間プレビュー</a:t>
+            </a:r>
           </a:p>
         </p:txBody>
       </p:sp>
@@ -3757,7 +3754,7 @@
           <p:cNvPr id="5" name="テキスト ボックス 4">
             <a:extLst>
               <a:ext uri="{FF2B5EF4-FFF2-40B4-BE49-F238E27FC236}">
-                <a16:creationId xmlns:a16="http://schemas.microsoft.com/office/drawing/2014/main" id="{AB789002-DF1F-7057-8267-9777FD447B8C}"/>
+                <a16:creationId xmlns:a16="http://schemas.microsoft.com/office/drawing/2014/main" id="{308DA5D2-ECFD-9990-9B5E-96621B203440}"/>
               </a:ext>
             </a:extLst>
           </p:cNvPr>
@@ -3804,7 +3801,7 @@
             <a:hlinkClick r:id="" action="ppaction://media"/>
             <a:extLst>
               <a:ext uri="{FF2B5EF4-FFF2-40B4-BE49-F238E27FC236}">
-                <a16:creationId xmlns:a16="http://schemas.microsoft.com/office/drawing/2014/main" id="{294D5523-86A0-FEC8-1B3A-68FFA7BDB413}"/>
+                <a16:creationId xmlns:a16="http://schemas.microsoft.com/office/drawing/2014/main" id="{37423383-8DC3-BA1A-E860-C86315A60D85}"/>
               </a:ext>
             </a:extLst>
           </p:cNvPr>
@@ -3839,7 +3836,7 @@
     </p:spTree>
     <p:extLst>
       <p:ext uri="{BB962C8B-B14F-4D97-AF65-F5344CB8AC3E}">
-        <p14:creationId xmlns:p14="http://schemas.microsoft.com/office/powerpoint/2010/main" val="2478671738"/>
+        <p14:creationId xmlns:p14="http://schemas.microsoft.com/office/powerpoint/2010/main" val="3708204076"/>
       </p:ext>
     </p:extLst>
   </p:cSld>
@@ -3963,7 +3960,7 @@
           <p:cNvPr id="2" name="テキスト ボックス 1">
             <a:extLst>
               <a:ext uri="{FF2B5EF4-FFF2-40B4-BE49-F238E27FC236}">
-                <a16:creationId xmlns:a16="http://schemas.microsoft.com/office/drawing/2014/main" id="{410AAA5B-55C2-ED19-8ED2-71CE4E72D7D2}"/>
+                <a16:creationId xmlns:a16="http://schemas.microsoft.com/office/drawing/2014/main" id="{FBB93F02-61DF-AAE5-8D3B-81EDBE44A806}"/>
               </a:ext>
             </a:extLst>
           </p:cNvPr>
@@ -4009,7 +4006,7 @@
           <p:cNvPr id="3" name="テキスト ボックス 2">
             <a:extLst>
               <a:ext uri="{FF2B5EF4-FFF2-40B4-BE49-F238E27FC236}">
-                <a16:creationId xmlns:a16="http://schemas.microsoft.com/office/drawing/2014/main" id="{3573AC16-E7A3-971A-461E-0397EE620F48}"/>
+                <a16:creationId xmlns:a16="http://schemas.microsoft.com/office/drawing/2014/main" id="{BF110D86-F6A0-66E6-A2E6-EA54E6FDB610}"/>
               </a:ext>
             </a:extLst>
           </p:cNvPr>
@@ -4033,20 +4030,14 @@
           <a:lstStyle/>
           <a:p>
             <a:r>
-              <a:rPr kumimoji="1" lang="en-US" altLang="ja-JP" sz="3400" b="1">
+              <a:rPr kumimoji="1" lang="ja-JP" altLang="en-US" sz="3400" b="1">
                 <a:solidFill>
                   <a:srgbClr val="111111"/>
                 </a:solidFill>
                 <a:latin typeface="Arial" panose="020B0604020202020204" pitchFamily="34" charset="0"/>
               </a:rPr>
-              <a:t>WHAT DOES IT SOLVE?</a:t>
-            </a:r>
-            <a:endParaRPr kumimoji="1" lang="ja-JP" altLang="en-US" sz="3400" b="1">
-              <a:solidFill>
-                <a:srgbClr val="111111"/>
-              </a:solidFill>
-              <a:latin typeface="Arial" panose="020B0604020202020204" pitchFamily="34" charset="0"/>
-            </a:endParaRPr>
+              <a:t>このプロジェクトは何を解決する？</a:t>
+            </a:r>
           </a:p>
         </p:txBody>
       </p:sp>
@@ -4055,7 +4046,7 @@
           <p:cNvPr id="4" name="テキスト ボックス 3">
             <a:extLst>
               <a:ext uri="{FF2B5EF4-FFF2-40B4-BE49-F238E27FC236}">
-                <a16:creationId xmlns:a16="http://schemas.microsoft.com/office/drawing/2014/main" id="{93E1EF4A-D18F-5FCF-72E6-4ACF76A69328}"/>
+                <a16:creationId xmlns:a16="http://schemas.microsoft.com/office/drawing/2014/main" id="{95BFFF1A-EDB4-7830-E10C-4EFC45DB94D2}"/>
               </a:ext>
             </a:extLst>
           </p:cNvPr>
@@ -4101,7 +4092,7 @@
           <p:cNvPr id="5" name="テキスト ボックス 4">
             <a:extLst>
               <a:ext uri="{FF2B5EF4-FFF2-40B4-BE49-F238E27FC236}">
-                <a16:creationId xmlns:a16="http://schemas.microsoft.com/office/drawing/2014/main" id="{D26E85C5-B2FF-9A0E-6B0F-547980BD89A9}"/>
+                <a16:creationId xmlns:a16="http://schemas.microsoft.com/office/drawing/2014/main" id="{831C00F4-715A-8891-121C-0F27905110F3}"/>
               </a:ext>
             </a:extLst>
           </p:cNvPr>
@@ -4148,7 +4139,7 @@
             <a:hlinkClick r:id="" action="ppaction://media"/>
             <a:extLst>
               <a:ext uri="{FF2B5EF4-FFF2-40B4-BE49-F238E27FC236}">
-                <a16:creationId xmlns:a16="http://schemas.microsoft.com/office/drawing/2014/main" id="{A33DDBA0-0095-0EA6-A6A1-746D75C4848D}"/>
+                <a16:creationId xmlns:a16="http://schemas.microsoft.com/office/drawing/2014/main" id="{705C1234-C675-8454-88A5-A3948CCA6C7F}"/>
               </a:ext>
             </a:extLst>
           </p:cNvPr>
@@ -4183,7 +4174,7 @@
     </p:spTree>
     <p:extLst>
       <p:ext uri="{BB962C8B-B14F-4D97-AF65-F5344CB8AC3E}">
-        <p14:creationId xmlns:p14="http://schemas.microsoft.com/office/powerpoint/2010/main" val="2060664329"/>
+        <p14:creationId xmlns:p14="http://schemas.microsoft.com/office/powerpoint/2010/main" val="646821939"/>
       </p:ext>
     </p:extLst>
   </p:cSld>
@@ -4307,7 +4298,7 @@
           <p:cNvPr id="2" name="テキスト ボックス 1">
             <a:extLst>
               <a:ext uri="{FF2B5EF4-FFF2-40B4-BE49-F238E27FC236}">
-                <a16:creationId xmlns:a16="http://schemas.microsoft.com/office/drawing/2014/main" id="{DAB1D160-A4DE-4659-01AE-2128FA7A4CE5}"/>
+                <a16:creationId xmlns:a16="http://schemas.microsoft.com/office/drawing/2014/main" id="{9DF80867-A4FF-A367-2BA6-6464D395BFE8}"/>
               </a:ext>
             </a:extLst>
           </p:cNvPr>
@@ -4353,7 +4344,7 @@
           <p:cNvPr id="3" name="テキスト ボックス 2">
             <a:extLst>
               <a:ext uri="{FF2B5EF4-FFF2-40B4-BE49-F238E27FC236}">
-                <a16:creationId xmlns:a16="http://schemas.microsoft.com/office/drawing/2014/main" id="{A7A6A254-BA77-B4CD-04A1-DDB6E51F5788}"/>
+                <a16:creationId xmlns:a16="http://schemas.microsoft.com/office/drawing/2014/main" id="{8064A4B1-AC05-C6A6-601B-B9E446AC5994}"/>
               </a:ext>
             </a:extLst>
           </p:cNvPr>
@@ -4377,20 +4368,14 @@
           <a:lstStyle/>
           <a:p>
             <a:r>
-              <a:rPr kumimoji="1" lang="en-US" altLang="ja-JP" sz="3400" b="1">
+              <a:rPr kumimoji="1" lang="ja-JP" altLang="en-US" sz="3400" b="1">
                 <a:solidFill>
                   <a:srgbClr val="111111"/>
                 </a:solidFill>
                 <a:latin typeface="Arial" panose="020B0604020202020204" pitchFamily="34" charset="0"/>
               </a:rPr>
-              <a:t>TECH STACK</a:t>
-            </a:r>
-            <a:endParaRPr kumimoji="1" lang="ja-JP" altLang="en-US" sz="3400" b="1">
-              <a:solidFill>
-                <a:srgbClr val="111111"/>
-              </a:solidFill>
-              <a:latin typeface="Arial" panose="020B0604020202020204" pitchFamily="34" charset="0"/>
-            </a:endParaRPr>
+              <a:t>技術スタック</a:t>
+            </a:r>
           </a:p>
         </p:txBody>
       </p:sp>
@@ -4399,7 +4384,7 @@
           <p:cNvPr id="4" name="テキスト ボックス 3">
             <a:extLst>
               <a:ext uri="{FF2B5EF4-FFF2-40B4-BE49-F238E27FC236}">
-                <a16:creationId xmlns:a16="http://schemas.microsoft.com/office/drawing/2014/main" id="{ECCE6C83-6EB7-EBD7-152E-C16F1E9B3735}"/>
+                <a16:creationId xmlns:a16="http://schemas.microsoft.com/office/drawing/2014/main" id="{6FA70160-61D3-2D95-742B-4F58786053F1}"/>
               </a:ext>
             </a:extLst>
           </p:cNvPr>
@@ -4409,7 +4394,7 @@
         <p:spPr>
           <a:xfrm>
             <a:off x="533400" y="3429000"/>
-            <a:ext cx="10795000" cy="400110"/>
+            <a:ext cx="10795000" cy="707886"/>
           </a:xfrm>
           <a:prstGeom prst="rect">
             <a:avLst/>
@@ -4423,13 +4408,22 @@
           <a:lstStyle/>
           <a:p>
             <a:r>
+              <a:rPr kumimoji="1" lang="ja-JP" altLang="en-US" sz="2000">
+                <a:solidFill>
+                  <a:srgbClr val="333333"/>
+                </a:solidFill>
+                <a:latin typeface="Arial" panose="020B0604020202020204" pitchFamily="34" charset="0"/>
+              </a:rPr>
+              <a:t>主要技術：</a:t>
+            </a:r>
+            <a:r>
               <a:rPr kumimoji="1" lang="en-US" altLang="ja-JP" sz="2000">
                 <a:solidFill>
                   <a:srgbClr val="333333"/>
                 </a:solidFill>
                 <a:latin typeface="Arial" panose="020B0604020202020204" pitchFamily="34" charset="0"/>
               </a:rPr>
-              <a:t>Primary technologies: TypeScript</a:t>
+              <a:t>TypeScript</a:t>
             </a:r>
             <a:r>
               <a:rPr kumimoji="1" lang="ja-JP" altLang="en-US" sz="2000">
@@ -4465,14 +4459,18 @@
                 </a:solidFill>
                 <a:latin typeface="Arial" panose="020B0604020202020204" pitchFamily="34" charset="0"/>
               </a:rPr>
-              <a:t>CSS</a:t>
-            </a:r>
-            <a:endParaRPr kumimoji="1" lang="ja-JP" altLang="en-US" sz="2000">
-              <a:solidFill>
-                <a:srgbClr val="333333"/>
-              </a:solidFill>
-              <a:latin typeface="Arial" panose="020B0604020202020204" pitchFamily="34" charset="0"/>
-            </a:endParaRPr>
+              <a:t>CSS
+</a:t>
+            </a:r>
+            <a:r>
+              <a:rPr kumimoji="1" lang="ja-JP" altLang="en-US" sz="2000">
+                <a:solidFill>
+                  <a:srgbClr val="333333"/>
+                </a:solidFill>
+                <a:latin typeface="Arial" panose="020B0604020202020204" pitchFamily="34" charset="0"/>
+              </a:rPr>
+              <a:t>役割を分け、保守しやすい構成を目指しています。</a:t>
+            </a:r>
           </a:p>
         </p:txBody>
       </p:sp>
@@ -4481,7 +4479,7 @@
           <p:cNvPr id="5" name="テキスト ボックス 4">
             <a:extLst>
               <a:ext uri="{FF2B5EF4-FFF2-40B4-BE49-F238E27FC236}">
-                <a16:creationId xmlns:a16="http://schemas.microsoft.com/office/drawing/2014/main" id="{EAAB4519-3BF9-8264-85F9-D40F1ED1D5B9}"/>
+                <a16:creationId xmlns:a16="http://schemas.microsoft.com/office/drawing/2014/main" id="{107B622F-797E-4488-C468-1CE0F20C0F59}"/>
               </a:ext>
             </a:extLst>
           </p:cNvPr>
@@ -4528,7 +4526,7 @@
             <a:hlinkClick r:id="" action="ppaction://media"/>
             <a:extLst>
               <a:ext uri="{FF2B5EF4-FFF2-40B4-BE49-F238E27FC236}">
-                <a16:creationId xmlns:a16="http://schemas.microsoft.com/office/drawing/2014/main" id="{EEFE2982-06F1-D39C-F4E5-795D3EF458C1}"/>
+                <a16:creationId xmlns:a16="http://schemas.microsoft.com/office/drawing/2014/main" id="{14B26585-64A2-85F4-EBFE-F1A13703B649}"/>
               </a:ext>
             </a:extLst>
           </p:cNvPr>
@@ -4563,7 +4561,7 @@
     </p:spTree>
     <p:extLst>
       <p:ext uri="{BB962C8B-B14F-4D97-AF65-F5344CB8AC3E}">
-        <p14:creationId xmlns:p14="http://schemas.microsoft.com/office/powerpoint/2010/main" val="2593097837"/>
+        <p14:creationId xmlns:p14="http://schemas.microsoft.com/office/powerpoint/2010/main" val="260047714"/>
       </p:ext>
     </p:extLst>
   </p:cSld>
@@ -4687,7 +4685,7 @@
           <p:cNvPr id="2" name="テキスト ボックス 1">
             <a:extLst>
               <a:ext uri="{FF2B5EF4-FFF2-40B4-BE49-F238E27FC236}">
-                <a16:creationId xmlns:a16="http://schemas.microsoft.com/office/drawing/2014/main" id="{FEA95178-883F-C38F-FA2B-E7805F1CCDE1}"/>
+                <a16:creationId xmlns:a16="http://schemas.microsoft.com/office/drawing/2014/main" id="{1EAFFB3B-1EE1-0159-E36A-750C00895EF3}"/>
               </a:ext>
             </a:extLst>
           </p:cNvPr>
@@ -4733,7 +4731,7 @@
           <p:cNvPr id="3" name="テキスト ボックス 2">
             <a:extLst>
               <a:ext uri="{FF2B5EF4-FFF2-40B4-BE49-F238E27FC236}">
-                <a16:creationId xmlns:a16="http://schemas.microsoft.com/office/drawing/2014/main" id="{202DB139-D1E3-228A-9B17-9ABD26120231}"/>
+                <a16:creationId xmlns:a16="http://schemas.microsoft.com/office/drawing/2014/main" id="{9214D01C-3624-6ADA-53DC-D5834C6F73E5}"/>
               </a:ext>
             </a:extLst>
           </p:cNvPr>
@@ -4757,20 +4755,14 @@
           <a:lstStyle/>
           <a:p>
             <a:r>
-              <a:rPr kumimoji="1" lang="en-US" altLang="ja-JP" sz="3400" b="1">
+              <a:rPr kumimoji="1" lang="ja-JP" altLang="en-US" sz="3400" b="1">
                 <a:solidFill>
                   <a:srgbClr val="111111"/>
                 </a:solidFill>
                 <a:latin typeface="Arial" panose="020B0604020202020204" pitchFamily="34" charset="0"/>
               </a:rPr>
-              <a:t>REPOSITORY HIGHLIGHTS</a:t>
-            </a:r>
-            <a:endParaRPr kumimoji="1" lang="ja-JP" altLang="en-US" sz="3400" b="1">
-              <a:solidFill>
-                <a:srgbClr val="111111"/>
-              </a:solidFill>
-              <a:latin typeface="Arial" panose="020B0604020202020204" pitchFamily="34" charset="0"/>
-            </a:endParaRPr>
+              <a:t>リポジトリの読みどころ</a:t>
+            </a:r>
           </a:p>
         </p:txBody>
       </p:sp>
@@ -4779,7 +4771,7 @@
           <p:cNvPr id="4" name="テキスト ボックス 3">
             <a:extLst>
               <a:ext uri="{FF2B5EF4-FFF2-40B4-BE49-F238E27FC236}">
-                <a16:creationId xmlns:a16="http://schemas.microsoft.com/office/drawing/2014/main" id="{A5FD2494-A836-1A5D-63FC-EB5498780D78}"/>
+                <a16:creationId xmlns:a16="http://schemas.microsoft.com/office/drawing/2014/main" id="{EC99D6E6-92BD-8F81-D059-3EC926F14D70}"/>
               </a:ext>
             </a:extLst>
           </p:cNvPr>
@@ -4789,7 +4781,7 @@
         <p:spPr>
           <a:xfrm>
             <a:off x="533400" y="3429000"/>
-            <a:ext cx="10795000" cy="400110"/>
+            <a:ext cx="10795000" cy="707886"/>
           </a:xfrm>
           <a:prstGeom prst="rect">
             <a:avLst/>
@@ -4803,13 +4795,77 @@
           <a:lstStyle/>
           <a:p>
             <a:r>
+              <a:rPr kumimoji="1" lang="ja-JP" altLang="en-US" sz="2000">
+                <a:solidFill>
+                  <a:srgbClr val="333333"/>
+                </a:solidFill>
+                <a:latin typeface="Arial" panose="020B0604020202020204" pitchFamily="34" charset="0"/>
+              </a:rPr>
+              <a:t>公開コード、</a:t>
+            </a:r>
+            <a:r>
               <a:rPr kumimoji="1" lang="en-US" altLang="ja-JP" sz="2000">
                 <a:solidFill>
                   <a:srgbClr val="333333"/>
                 </a:solidFill>
                 <a:latin typeface="Arial" panose="020B0604020202020204" pitchFamily="34" charset="0"/>
               </a:rPr>
-              <a:t>Public source code, README and commit history reveal the design decisions.</a:t>
+              <a:t>README</a:t>
+            </a:r>
+            <a:r>
+              <a:rPr kumimoji="1" lang="ja-JP" altLang="en-US" sz="2000">
+                <a:solidFill>
+                  <a:srgbClr val="333333"/>
+                </a:solidFill>
+                <a:latin typeface="Arial" panose="020B0604020202020204" pitchFamily="34" charset="0"/>
+              </a:rPr>
+              <a:t>、コミット履歴から設計判断を確認できます。
+主なファイル：</a:t>
+            </a:r>
+            <a:r>
+              <a:rPr kumimoji="1" lang="en-US" altLang="ja-JP" sz="2000">
+                <a:solidFill>
+                  <a:srgbClr val="333333"/>
+                </a:solidFill>
+                <a:latin typeface="Arial" panose="020B0604020202020204" pitchFamily="34" charset="0"/>
+              </a:rPr>
+              <a:t>AGENTS.md</a:t>
+            </a:r>
+            <a:r>
+              <a:rPr kumimoji="1" lang="ja-JP" altLang="en-US" sz="2000">
+                <a:solidFill>
+                  <a:srgbClr val="333333"/>
+                </a:solidFill>
+                <a:latin typeface="Arial" panose="020B0604020202020204" pitchFamily="34" charset="0"/>
+              </a:rPr>
+              <a:t>、</a:t>
+            </a:r>
+            <a:r>
+              <a:rPr kumimoji="1" lang="en-US" altLang="ja-JP" sz="2000">
+                <a:solidFill>
+                  <a:srgbClr val="333333"/>
+                </a:solidFill>
+                <a:latin typeface="Arial" panose="020B0604020202020204" pitchFamily="34" charset="0"/>
+              </a:rPr>
+              <a:t>CLAUDE.md</a:t>
+            </a:r>
+            <a:r>
+              <a:rPr kumimoji="1" lang="ja-JP" altLang="en-US" sz="2000">
+                <a:solidFill>
+                  <a:srgbClr val="333333"/>
+                </a:solidFill>
+                <a:latin typeface="Arial" panose="020B0604020202020204" pitchFamily="34" charset="0"/>
+              </a:rPr>
+              <a:t>、</a:t>
+            </a:r>
+            <a:r>
+              <a:rPr kumimoji="1" lang="en-US" altLang="ja-JP" sz="2000">
+                <a:solidFill>
+                  <a:srgbClr val="333333"/>
+                </a:solidFill>
+                <a:latin typeface="Arial" panose="020B0604020202020204" pitchFamily="34" charset="0"/>
+              </a:rPr>
+              <a:t>README.md</a:t>
             </a:r>
             <a:endParaRPr kumimoji="1" lang="ja-JP" altLang="en-US" sz="2000">
               <a:solidFill>
@@ -4825,7 +4881,7 @@
           <p:cNvPr id="5" name="テキスト ボックス 4">
             <a:extLst>
               <a:ext uri="{FF2B5EF4-FFF2-40B4-BE49-F238E27FC236}">
-                <a16:creationId xmlns:a16="http://schemas.microsoft.com/office/drawing/2014/main" id="{9245B178-D69C-CD5D-B213-269979C4B588}"/>
+                <a16:creationId xmlns:a16="http://schemas.microsoft.com/office/drawing/2014/main" id="{145C8378-10EE-2C70-BB37-86E69957D0E7}"/>
               </a:ext>
             </a:extLst>
           </p:cNvPr>
@@ -4872,7 +4928,7 @@
             <a:hlinkClick r:id="" action="ppaction://media"/>
             <a:extLst>
               <a:ext uri="{FF2B5EF4-FFF2-40B4-BE49-F238E27FC236}">
-                <a16:creationId xmlns:a16="http://schemas.microsoft.com/office/drawing/2014/main" id="{2531EF49-6DF8-D8AC-F71E-0460C4E2E70D}"/>
+                <a16:creationId xmlns:a16="http://schemas.microsoft.com/office/drawing/2014/main" id="{FF034544-7542-3EF3-9D28-73059F46567A}"/>
               </a:ext>
             </a:extLst>
           </p:cNvPr>
@@ -4907,7 +4963,7 @@
     </p:spTree>
     <p:extLst>
       <p:ext uri="{BB962C8B-B14F-4D97-AF65-F5344CB8AC3E}">
-        <p14:creationId xmlns:p14="http://schemas.microsoft.com/office/powerpoint/2010/main" val="2328560775"/>
+        <p14:creationId xmlns:p14="http://schemas.microsoft.com/office/powerpoint/2010/main" val="574987850"/>
       </p:ext>
     </p:extLst>
   </p:cSld>
@@ -5031,7 +5087,7 @@
           <p:cNvPr id="2" name="テキスト ボックス 1">
             <a:extLst>
               <a:ext uri="{FF2B5EF4-FFF2-40B4-BE49-F238E27FC236}">
-                <a16:creationId xmlns:a16="http://schemas.microsoft.com/office/drawing/2014/main" id="{AAA31B14-A590-C558-622E-F3C722862F50}"/>
+                <a16:creationId xmlns:a16="http://schemas.microsoft.com/office/drawing/2014/main" id="{8D537C35-22E0-573A-C3A7-2DE94687EF01}"/>
               </a:ext>
             </a:extLst>
           </p:cNvPr>
@@ -5077,7 +5133,7 @@
           <p:cNvPr id="3" name="テキスト ボックス 2">
             <a:extLst>
               <a:ext uri="{FF2B5EF4-FFF2-40B4-BE49-F238E27FC236}">
-                <a16:creationId xmlns:a16="http://schemas.microsoft.com/office/drawing/2014/main" id="{85B318D0-395B-58EE-3B8B-F68A3F4BEC3C}"/>
+                <a16:creationId xmlns:a16="http://schemas.microsoft.com/office/drawing/2014/main" id="{DE9034C5-2D5F-1FF9-AD76-C855EE259DCF}"/>
               </a:ext>
             </a:extLst>
           </p:cNvPr>
@@ -5101,20 +5157,14 @@
           <a:lstStyle/>
           <a:p>
             <a:r>
-              <a:rPr kumimoji="1" lang="en-US" altLang="ja-JP" sz="3400" b="1">
+              <a:rPr kumimoji="1" lang="ja-JP" altLang="en-US" sz="3400" b="1">
                 <a:solidFill>
                   <a:srgbClr val="111111"/>
                 </a:solidFill>
                 <a:latin typeface="Arial" panose="020B0604020202020204" pitchFamily="34" charset="0"/>
               </a:rPr>
-              <a:t>ITERATIVE IMPROVEMENT</a:t>
-            </a:r>
-            <a:endParaRPr kumimoji="1" lang="ja-JP" altLang="en-US" sz="3400" b="1">
-              <a:solidFill>
-                <a:srgbClr val="111111"/>
-              </a:solidFill>
-              <a:latin typeface="Arial" panose="020B0604020202020204" pitchFamily="34" charset="0"/>
-            </a:endParaRPr>
+              <a:t>コミットから分かる改善</a:t>
+            </a:r>
           </a:p>
         </p:txBody>
       </p:sp>
@@ -5123,7 +5173,7 @@
           <p:cNvPr id="4" name="テキスト ボックス 3">
             <a:extLst>
               <a:ext uri="{FF2B5EF4-FFF2-40B4-BE49-F238E27FC236}">
-                <a16:creationId xmlns:a16="http://schemas.microsoft.com/office/drawing/2014/main" id="{D0E9A855-EDE4-9301-1C08-01F41CB41044}"/>
+                <a16:creationId xmlns:a16="http://schemas.microsoft.com/office/drawing/2014/main" id="{CDC735C6-5AB1-6F91-EFDE-546E0DE58B16}"/>
               </a:ext>
             </a:extLst>
           </p:cNvPr>
@@ -5153,7 +5203,7 @@
                 </a:solidFill>
                 <a:latin typeface="Arial" panose="020B0604020202020204" pitchFamily="34" charset="0"/>
               </a:rPr>
-              <a:t>Small commits continuously improve features, quality and release readiness.</a:t>
+              <a:t>Initial DQ Walk free-to-play / auto-battle composition guide</a:t>
             </a:r>
             <a:endParaRPr kumimoji="1" lang="ja-JP" altLang="en-US" sz="2000">
               <a:solidFill>
@@ -5169,7 +5219,7 @@
           <p:cNvPr id="5" name="テキスト ボックス 4">
             <a:extLst>
               <a:ext uri="{FF2B5EF4-FFF2-40B4-BE49-F238E27FC236}">
-                <a16:creationId xmlns:a16="http://schemas.microsoft.com/office/drawing/2014/main" id="{1D2965C9-518C-E5C6-B1EA-CAA02E87570A}"/>
+                <a16:creationId xmlns:a16="http://schemas.microsoft.com/office/drawing/2014/main" id="{7DE7E487-1524-59DE-7C52-A7815B3E35C6}"/>
               </a:ext>
             </a:extLst>
           </p:cNvPr>
@@ -5216,7 +5266,7 @@
             <a:hlinkClick r:id="" action="ppaction://media"/>
             <a:extLst>
               <a:ext uri="{FF2B5EF4-FFF2-40B4-BE49-F238E27FC236}">
-                <a16:creationId xmlns:a16="http://schemas.microsoft.com/office/drawing/2014/main" id="{21A19C32-EF04-A76F-FDC5-5892D6B1DDA7}"/>
+                <a16:creationId xmlns:a16="http://schemas.microsoft.com/office/drawing/2014/main" id="{D0142719-25BB-74B8-8FFE-27650E477941}"/>
               </a:ext>
             </a:extLst>
           </p:cNvPr>
@@ -5251,7 +5301,7 @@
     </p:spTree>
     <p:extLst>
       <p:ext uri="{BB962C8B-B14F-4D97-AF65-F5344CB8AC3E}">
-        <p14:creationId xmlns:p14="http://schemas.microsoft.com/office/powerpoint/2010/main" val="3694886764"/>
+        <p14:creationId xmlns:p14="http://schemas.microsoft.com/office/powerpoint/2010/main" val="3748890160"/>
       </p:ext>
     </p:extLst>
   </p:cSld>
@@ -5375,7 +5425,7 @@
           <p:cNvPr id="2" name="テキスト ボックス 1">
             <a:extLst>
               <a:ext uri="{FF2B5EF4-FFF2-40B4-BE49-F238E27FC236}">
-                <a16:creationId xmlns:a16="http://schemas.microsoft.com/office/drawing/2014/main" id="{B06FC3EB-CD87-3D1F-E3A9-346D32C68347}"/>
+                <a16:creationId xmlns:a16="http://schemas.microsoft.com/office/drawing/2014/main" id="{2D148E3F-FA31-846E-9CD4-0270D7711FAF}"/>
               </a:ext>
             </a:extLst>
           </p:cNvPr>
@@ -5421,7 +5471,7 @@
           <p:cNvPr id="3" name="テキスト ボックス 2">
             <a:extLst>
               <a:ext uri="{FF2B5EF4-FFF2-40B4-BE49-F238E27FC236}">
-                <a16:creationId xmlns:a16="http://schemas.microsoft.com/office/drawing/2014/main" id="{D4737B06-1E71-DFDB-039C-80866E948856}"/>
+                <a16:creationId xmlns:a16="http://schemas.microsoft.com/office/drawing/2014/main" id="{44B35A20-8CDA-7236-DA89-551812F50DA8}"/>
               </a:ext>
             </a:extLst>
           </p:cNvPr>
@@ -5445,20 +5495,14 @@
           <a:lstStyle/>
           <a:p>
             <a:r>
-              <a:rPr kumimoji="1" lang="en-US" altLang="ja-JP" sz="3400" b="1">
+              <a:rPr kumimoji="1" lang="ja-JP" altLang="en-US" sz="3400" b="1">
                 <a:solidFill>
                   <a:srgbClr val="111111"/>
                 </a:solidFill>
                 <a:latin typeface="Arial" panose="020B0604020202020204" pitchFamily="34" charset="0"/>
               </a:rPr>
-              <a:t>READ THE FULL ARTICLE</a:t>
-            </a:r>
-            <a:endParaRPr kumimoji="1" lang="ja-JP" altLang="en-US" sz="3400" b="1">
-              <a:solidFill>
-                <a:srgbClr val="111111"/>
-              </a:solidFill>
-              <a:latin typeface="Arial" panose="020B0604020202020204" pitchFamily="34" charset="0"/>
-            </a:endParaRPr>
+              <a:t>詳しくは積み上げログへ</a:t>
+            </a:r>
           </a:p>
         </p:txBody>
       </p:sp>
@@ -5467,7 +5511,7 @@
           <p:cNvPr id="4" name="テキスト ボックス 3">
             <a:extLst>
               <a:ext uri="{FF2B5EF4-FFF2-40B4-BE49-F238E27FC236}">
-                <a16:creationId xmlns:a16="http://schemas.microsoft.com/office/drawing/2014/main" id="{1DAB2C43-1A6D-EE43-D018-4CCB691CED99}"/>
+                <a16:creationId xmlns:a16="http://schemas.microsoft.com/office/drawing/2014/main" id="{940B9753-E181-70A5-2B06-63E94C7C75A9}"/>
               </a:ext>
             </a:extLst>
           </p:cNvPr>
@@ -5491,14 +5535,32 @@
           <a:lstStyle/>
           <a:p>
             <a:r>
-              <a:rPr kumimoji="1" lang="sv-SE" altLang="ja-JP" sz="2000">
+              <a:rPr kumimoji="1" lang="zh-TW" altLang="en-US" sz="2000">
+                <a:solidFill>
+                  <a:srgbClr val="333333"/>
+                </a:solidFill>
+                <a:latin typeface="Arial" panose="020B0604020202020204" pitchFamily="34" charset="0"/>
+              </a:rPr>
+              <a:t>記事： </a:t>
+            </a:r>
+            <a:r>
+              <a:rPr kumimoji="1" lang="en-US" altLang="zh-TW" sz="2000">
                 <a:solidFill>
                   <a:srgbClr val="333333"/>
                 </a:solidFill>
                 <a:latin typeface="Arial" panose="020B0604020202020204" pitchFamily="34" charset="0"/>
               </a:rPr>
               <a:t>https://syunnjack.dev/articles/autohensei
-TSUMIAGE LOG</a:t>
+</a:t>
+            </a:r>
+            <a:r>
+              <a:rPr kumimoji="1" lang="zh-TW" altLang="en-US" sz="2000">
+                <a:solidFill>
+                  <a:srgbClr val="333333"/>
+                </a:solidFill>
+                <a:latin typeface="Arial" panose="020B0604020202020204" pitchFamily="34" charset="0"/>
+              </a:rPr>
+              <a:t>学び、作り、振り返る開発記録。</a:t>
             </a:r>
             <a:endParaRPr kumimoji="1" lang="ja-JP" altLang="en-US" sz="2000">
               <a:solidFill>
@@ -5514,7 +5576,7 @@
           <p:cNvPr id="5" name="テキスト ボックス 4">
             <a:extLst>
               <a:ext uri="{FF2B5EF4-FFF2-40B4-BE49-F238E27FC236}">
-                <a16:creationId xmlns:a16="http://schemas.microsoft.com/office/drawing/2014/main" id="{660CF7C0-63D8-360F-82EF-BFDF99D98C7E}"/>
+                <a16:creationId xmlns:a16="http://schemas.microsoft.com/office/drawing/2014/main" id="{54AC48D4-8B02-8B51-F2D6-B2E9625A5063}"/>
               </a:ext>
             </a:extLst>
           </p:cNvPr>
@@ -5561,7 +5623,7 @@
             <a:hlinkClick r:id="" action="ppaction://media"/>
             <a:extLst>
               <a:ext uri="{FF2B5EF4-FFF2-40B4-BE49-F238E27FC236}">
-                <a16:creationId xmlns:a16="http://schemas.microsoft.com/office/drawing/2014/main" id="{65307030-6740-1BFB-3D1F-08EAFD7E0DAA}"/>
+                <a16:creationId xmlns:a16="http://schemas.microsoft.com/office/drawing/2014/main" id="{57FDDE05-5CCD-1809-2552-13C167F52B89}"/>
               </a:ext>
             </a:extLst>
           </p:cNvPr>
@@ -5596,7 +5658,7 @@
     </p:spTree>
     <p:extLst>
       <p:ext uri="{BB962C8B-B14F-4D97-AF65-F5344CB8AC3E}">
-        <p14:creationId xmlns:p14="http://schemas.microsoft.com/office/powerpoint/2010/main" val="1506880062"/>
+        <p14:creationId xmlns:p14="http://schemas.microsoft.com/office/powerpoint/2010/main" val="1585609129"/>
       </p:ext>
     </p:extLst>
   </p:cSld>

--- a/public/videos/repositories/autohensei/autohensei-tech-preview.pptx
+++ b/public/videos/repositories/autohensei/autohensei-tech-preview.pptx
@@ -134,7 +134,7 @@
           <p:cNvPr id="2" name="タイトル 1">
             <a:extLst>
               <a:ext uri="{FF2B5EF4-FFF2-40B4-BE49-F238E27FC236}">
-                <a16:creationId xmlns:a16="http://schemas.microsoft.com/office/drawing/2014/main" id="{EAFBA7E3-C5C8-DE27-9BFC-2F3998266AE4}"/>
+                <a16:creationId xmlns:a16="http://schemas.microsoft.com/office/drawing/2014/main" id="{203068FB-68D8-1777-FEB7-F8B23240A34C}"/>
               </a:ext>
             </a:extLst>
           </p:cNvPr>
@@ -171,7 +171,7 @@
           <p:cNvPr id="3" name="字幕 2">
             <a:extLst>
               <a:ext uri="{FF2B5EF4-FFF2-40B4-BE49-F238E27FC236}">
-                <a16:creationId xmlns:a16="http://schemas.microsoft.com/office/drawing/2014/main" id="{0BA09C35-1038-0702-A9FF-56AFBD26E449}"/>
+                <a16:creationId xmlns:a16="http://schemas.microsoft.com/office/drawing/2014/main" id="{86A077A6-5839-9736-1C57-1807E0C08928}"/>
               </a:ext>
             </a:extLst>
           </p:cNvPr>
@@ -241,7 +241,7 @@
           <p:cNvPr id="4" name="日付プレースホルダー 3">
             <a:extLst>
               <a:ext uri="{FF2B5EF4-FFF2-40B4-BE49-F238E27FC236}">
-                <a16:creationId xmlns:a16="http://schemas.microsoft.com/office/drawing/2014/main" id="{75FAC912-C113-D167-B79B-76336EF7895B}"/>
+                <a16:creationId xmlns:a16="http://schemas.microsoft.com/office/drawing/2014/main" id="{5C67F4BC-E56B-7C15-62BC-D1B84A2F8C38}"/>
               </a:ext>
             </a:extLst>
           </p:cNvPr>
@@ -257,7 +257,7 @@
           <a:bodyPr/>
           <a:lstStyle/>
           <a:p>
-            <a:fld id="{86E5C8E2-7CC4-4A62-8060-BEAF6303C999}" type="datetimeFigureOut">
+            <a:fld id="{EFF6C402-2530-434A-80B3-CD0197C21F23}" type="datetimeFigureOut">
               <a:rPr kumimoji="1" lang="ja-JP" altLang="en-US" smtClean="0"/>
               <a:t>2026/7/30</a:t>
             </a:fld>
@@ -270,7 +270,7 @@
           <p:cNvPr id="5" name="フッター プレースホルダー 4">
             <a:extLst>
               <a:ext uri="{FF2B5EF4-FFF2-40B4-BE49-F238E27FC236}">
-                <a16:creationId xmlns:a16="http://schemas.microsoft.com/office/drawing/2014/main" id="{8B099044-1CCE-7AE9-04F3-490E3418B6AB}"/>
+                <a16:creationId xmlns:a16="http://schemas.microsoft.com/office/drawing/2014/main" id="{E602DA6C-2BFC-BB05-7BC8-7BEB01A1B982}"/>
               </a:ext>
             </a:extLst>
           </p:cNvPr>
@@ -295,7 +295,7 @@
           <p:cNvPr id="6" name="スライド番号プレースホルダー 5">
             <a:extLst>
               <a:ext uri="{FF2B5EF4-FFF2-40B4-BE49-F238E27FC236}">
-                <a16:creationId xmlns:a16="http://schemas.microsoft.com/office/drawing/2014/main" id="{41471D33-D759-304C-FBD1-01C66775730E}"/>
+                <a16:creationId xmlns:a16="http://schemas.microsoft.com/office/drawing/2014/main" id="{C576C084-099E-D526-520E-3842AE70C7B0}"/>
               </a:ext>
             </a:extLst>
           </p:cNvPr>
@@ -311,7 +311,7 @@
           <a:bodyPr/>
           <a:lstStyle/>
           <a:p>
-            <a:fld id="{10E2B5AC-89FB-48EB-9CCF-510AF25C1A40}" type="slidenum">
+            <a:fld id="{CF4FFC3E-1C72-4461-AD55-265BC387821F}" type="slidenum">
               <a:rPr kumimoji="1" lang="ja-JP" altLang="en-US" smtClean="0"/>
               <a:t>‹#›</a:t>
             </a:fld>
@@ -322,7 +322,7 @@
     </p:spTree>
     <p:extLst>
       <p:ext uri="{BB962C8B-B14F-4D97-AF65-F5344CB8AC3E}">
-        <p14:creationId xmlns:p14="http://schemas.microsoft.com/office/powerpoint/2010/main" val="239732639"/>
+        <p14:creationId xmlns:p14="http://schemas.microsoft.com/office/powerpoint/2010/main" val="1849699727"/>
       </p:ext>
     </p:extLst>
   </p:cSld>
@@ -354,7 +354,7 @@
           <p:cNvPr id="2" name="タイトル 1">
             <a:extLst>
               <a:ext uri="{FF2B5EF4-FFF2-40B4-BE49-F238E27FC236}">
-                <a16:creationId xmlns:a16="http://schemas.microsoft.com/office/drawing/2014/main" id="{75F39151-9C29-E160-468C-D0CDF43B8A83}"/>
+                <a16:creationId xmlns:a16="http://schemas.microsoft.com/office/drawing/2014/main" id="{C1BDA28F-BBDC-CCDF-4A22-BF319C7CE688}"/>
               </a:ext>
             </a:extLst>
           </p:cNvPr>
@@ -382,7 +382,7 @@
           <p:cNvPr id="3" name="縦書きテキスト プレースホルダー 2">
             <a:extLst>
               <a:ext uri="{FF2B5EF4-FFF2-40B4-BE49-F238E27FC236}">
-                <a16:creationId xmlns:a16="http://schemas.microsoft.com/office/drawing/2014/main" id="{8BC8CDA5-70D2-5805-80F3-A7BF93BBD20B}"/>
+                <a16:creationId xmlns:a16="http://schemas.microsoft.com/office/drawing/2014/main" id="{CC744082-89B4-54D7-F8E6-B5E866A1FEF9}"/>
               </a:ext>
             </a:extLst>
           </p:cNvPr>
@@ -471,7 +471,7 @@
           <p:cNvPr id="4" name="日付プレースホルダー 3">
             <a:extLst>
               <a:ext uri="{FF2B5EF4-FFF2-40B4-BE49-F238E27FC236}">
-                <a16:creationId xmlns:a16="http://schemas.microsoft.com/office/drawing/2014/main" id="{A4A46C29-4FBF-4208-2C91-59C65948995D}"/>
+                <a16:creationId xmlns:a16="http://schemas.microsoft.com/office/drawing/2014/main" id="{CF9AE69E-0880-7BE3-8952-5C172BAC35A1}"/>
               </a:ext>
             </a:extLst>
           </p:cNvPr>
@@ -487,7 +487,7 @@
           <a:bodyPr/>
           <a:lstStyle/>
           <a:p>
-            <a:fld id="{86E5C8E2-7CC4-4A62-8060-BEAF6303C999}" type="datetimeFigureOut">
+            <a:fld id="{EFF6C402-2530-434A-80B3-CD0197C21F23}" type="datetimeFigureOut">
               <a:rPr kumimoji="1" lang="ja-JP" altLang="en-US" smtClean="0"/>
               <a:t>2026/7/30</a:t>
             </a:fld>
@@ -500,7 +500,7 @@
           <p:cNvPr id="5" name="フッター プレースホルダー 4">
             <a:extLst>
               <a:ext uri="{FF2B5EF4-FFF2-40B4-BE49-F238E27FC236}">
-                <a16:creationId xmlns:a16="http://schemas.microsoft.com/office/drawing/2014/main" id="{6D9F30FE-1BB8-69DF-CA6B-08B5E52774B1}"/>
+                <a16:creationId xmlns:a16="http://schemas.microsoft.com/office/drawing/2014/main" id="{E9814951-E273-1159-96DB-D8751024232B}"/>
               </a:ext>
             </a:extLst>
           </p:cNvPr>
@@ -525,7 +525,7 @@
           <p:cNvPr id="6" name="スライド番号プレースホルダー 5">
             <a:extLst>
               <a:ext uri="{FF2B5EF4-FFF2-40B4-BE49-F238E27FC236}">
-                <a16:creationId xmlns:a16="http://schemas.microsoft.com/office/drawing/2014/main" id="{AC351582-AEB8-A85F-2E4B-9650CF34FA68}"/>
+                <a16:creationId xmlns:a16="http://schemas.microsoft.com/office/drawing/2014/main" id="{9726CD1C-7879-32B8-C049-B0AD003B98AF}"/>
               </a:ext>
             </a:extLst>
           </p:cNvPr>
@@ -541,7 +541,7 @@
           <a:bodyPr/>
           <a:lstStyle/>
           <a:p>
-            <a:fld id="{10E2B5AC-89FB-48EB-9CCF-510AF25C1A40}" type="slidenum">
+            <a:fld id="{CF4FFC3E-1C72-4461-AD55-265BC387821F}" type="slidenum">
               <a:rPr kumimoji="1" lang="ja-JP" altLang="en-US" smtClean="0"/>
               <a:t>‹#›</a:t>
             </a:fld>
@@ -552,7 +552,7 @@
     </p:spTree>
     <p:extLst>
       <p:ext uri="{BB962C8B-B14F-4D97-AF65-F5344CB8AC3E}">
-        <p14:creationId xmlns:p14="http://schemas.microsoft.com/office/powerpoint/2010/main" val="19018369"/>
+        <p14:creationId xmlns:p14="http://schemas.microsoft.com/office/powerpoint/2010/main" val="941684527"/>
       </p:ext>
     </p:extLst>
   </p:cSld>
@@ -584,7 +584,7 @@
           <p:cNvPr id="2" name="縦書きタイトル 1">
             <a:extLst>
               <a:ext uri="{FF2B5EF4-FFF2-40B4-BE49-F238E27FC236}">
-                <a16:creationId xmlns:a16="http://schemas.microsoft.com/office/drawing/2014/main" id="{650EBA5B-16FB-7045-6964-AB0CFCF908C9}"/>
+                <a16:creationId xmlns:a16="http://schemas.microsoft.com/office/drawing/2014/main" id="{551E857A-3372-41AC-A754-B84482FC5377}"/>
               </a:ext>
             </a:extLst>
           </p:cNvPr>
@@ -617,7 +617,7 @@
           <p:cNvPr id="3" name="縦書きテキスト プレースホルダー 2">
             <a:extLst>
               <a:ext uri="{FF2B5EF4-FFF2-40B4-BE49-F238E27FC236}">
-                <a16:creationId xmlns:a16="http://schemas.microsoft.com/office/drawing/2014/main" id="{A3509A3B-0623-8AF8-9E46-3916C1398031}"/>
+                <a16:creationId xmlns:a16="http://schemas.microsoft.com/office/drawing/2014/main" id="{B1432B66-199D-7BF5-FA95-BE81B0082097}"/>
               </a:ext>
             </a:extLst>
           </p:cNvPr>
@@ -711,7 +711,7 @@
           <p:cNvPr id="4" name="日付プレースホルダー 3">
             <a:extLst>
               <a:ext uri="{FF2B5EF4-FFF2-40B4-BE49-F238E27FC236}">
-                <a16:creationId xmlns:a16="http://schemas.microsoft.com/office/drawing/2014/main" id="{CDD3992E-3F01-B441-DAA5-18046A9359E2}"/>
+                <a16:creationId xmlns:a16="http://schemas.microsoft.com/office/drawing/2014/main" id="{42B6B876-29DD-F71F-421C-FDF2496BFA27}"/>
               </a:ext>
             </a:extLst>
           </p:cNvPr>
@@ -727,7 +727,7 @@
           <a:bodyPr/>
           <a:lstStyle/>
           <a:p>
-            <a:fld id="{86E5C8E2-7CC4-4A62-8060-BEAF6303C999}" type="datetimeFigureOut">
+            <a:fld id="{EFF6C402-2530-434A-80B3-CD0197C21F23}" type="datetimeFigureOut">
               <a:rPr kumimoji="1" lang="ja-JP" altLang="en-US" smtClean="0"/>
               <a:t>2026/7/30</a:t>
             </a:fld>
@@ -740,7 +740,7 @@
           <p:cNvPr id="5" name="フッター プレースホルダー 4">
             <a:extLst>
               <a:ext uri="{FF2B5EF4-FFF2-40B4-BE49-F238E27FC236}">
-                <a16:creationId xmlns:a16="http://schemas.microsoft.com/office/drawing/2014/main" id="{B9146053-3DB0-4F03-FB41-20973D811AD5}"/>
+                <a16:creationId xmlns:a16="http://schemas.microsoft.com/office/drawing/2014/main" id="{C8F7D36F-21BD-6191-473B-101F74EA8CF8}"/>
               </a:ext>
             </a:extLst>
           </p:cNvPr>
@@ -765,7 +765,7 @@
           <p:cNvPr id="6" name="スライド番号プレースホルダー 5">
             <a:extLst>
               <a:ext uri="{FF2B5EF4-FFF2-40B4-BE49-F238E27FC236}">
-                <a16:creationId xmlns:a16="http://schemas.microsoft.com/office/drawing/2014/main" id="{B6FABD24-7FB9-1D49-3180-BB5EFB702046}"/>
+                <a16:creationId xmlns:a16="http://schemas.microsoft.com/office/drawing/2014/main" id="{3C08648B-BC8E-ABE7-A799-119B1A003146}"/>
               </a:ext>
             </a:extLst>
           </p:cNvPr>
@@ -781,7 +781,7 @@
           <a:bodyPr/>
           <a:lstStyle/>
           <a:p>
-            <a:fld id="{10E2B5AC-89FB-48EB-9CCF-510AF25C1A40}" type="slidenum">
+            <a:fld id="{CF4FFC3E-1C72-4461-AD55-265BC387821F}" type="slidenum">
               <a:rPr kumimoji="1" lang="ja-JP" altLang="en-US" smtClean="0"/>
               <a:t>‹#›</a:t>
             </a:fld>
@@ -792,7 +792,7 @@
     </p:spTree>
     <p:extLst>
       <p:ext uri="{BB962C8B-B14F-4D97-AF65-F5344CB8AC3E}">
-        <p14:creationId xmlns:p14="http://schemas.microsoft.com/office/powerpoint/2010/main" val="2209829553"/>
+        <p14:creationId xmlns:p14="http://schemas.microsoft.com/office/powerpoint/2010/main" val="586547338"/>
       </p:ext>
     </p:extLst>
   </p:cSld>
@@ -824,7 +824,7 @@
           <p:cNvPr id="2" name="タイトル 1">
             <a:extLst>
               <a:ext uri="{FF2B5EF4-FFF2-40B4-BE49-F238E27FC236}">
-                <a16:creationId xmlns:a16="http://schemas.microsoft.com/office/drawing/2014/main" id="{3386CE42-38DF-BEA8-B999-5C684BAD7BDA}"/>
+                <a16:creationId xmlns:a16="http://schemas.microsoft.com/office/drawing/2014/main" id="{55B12FDB-5CED-7395-70B7-365B84A2C4EB}"/>
               </a:ext>
             </a:extLst>
           </p:cNvPr>
@@ -852,7 +852,7 @@
           <p:cNvPr id="3" name="コンテンツ プレースホルダー 2">
             <a:extLst>
               <a:ext uri="{FF2B5EF4-FFF2-40B4-BE49-F238E27FC236}">
-                <a16:creationId xmlns:a16="http://schemas.microsoft.com/office/drawing/2014/main" id="{9E42D653-7D09-CF9A-9035-8800E4A9A8AA}"/>
+                <a16:creationId xmlns:a16="http://schemas.microsoft.com/office/drawing/2014/main" id="{0D795328-A394-1D0E-AA21-F828F12724D4}"/>
               </a:ext>
             </a:extLst>
           </p:cNvPr>
@@ -941,7 +941,7 @@
           <p:cNvPr id="4" name="日付プレースホルダー 3">
             <a:extLst>
               <a:ext uri="{FF2B5EF4-FFF2-40B4-BE49-F238E27FC236}">
-                <a16:creationId xmlns:a16="http://schemas.microsoft.com/office/drawing/2014/main" id="{936FE06A-4071-17A9-B462-38975BF05C13}"/>
+                <a16:creationId xmlns:a16="http://schemas.microsoft.com/office/drawing/2014/main" id="{5DDB8F2F-3A0F-7294-C171-FC09D4669FF7}"/>
               </a:ext>
             </a:extLst>
           </p:cNvPr>
@@ -957,7 +957,7 @@
           <a:bodyPr/>
           <a:lstStyle/>
           <a:p>
-            <a:fld id="{86E5C8E2-7CC4-4A62-8060-BEAF6303C999}" type="datetimeFigureOut">
+            <a:fld id="{EFF6C402-2530-434A-80B3-CD0197C21F23}" type="datetimeFigureOut">
               <a:rPr kumimoji="1" lang="ja-JP" altLang="en-US" smtClean="0"/>
               <a:t>2026/7/30</a:t>
             </a:fld>
@@ -970,7 +970,7 @@
           <p:cNvPr id="5" name="フッター プレースホルダー 4">
             <a:extLst>
               <a:ext uri="{FF2B5EF4-FFF2-40B4-BE49-F238E27FC236}">
-                <a16:creationId xmlns:a16="http://schemas.microsoft.com/office/drawing/2014/main" id="{9183B347-DE9F-AD1D-C949-F8A803E2D708}"/>
+                <a16:creationId xmlns:a16="http://schemas.microsoft.com/office/drawing/2014/main" id="{352AFFBB-BC8B-8347-C604-8A6DA5E3102F}"/>
               </a:ext>
             </a:extLst>
           </p:cNvPr>
@@ -995,7 +995,7 @@
           <p:cNvPr id="6" name="スライド番号プレースホルダー 5">
             <a:extLst>
               <a:ext uri="{FF2B5EF4-FFF2-40B4-BE49-F238E27FC236}">
-                <a16:creationId xmlns:a16="http://schemas.microsoft.com/office/drawing/2014/main" id="{DCC2C586-0AE7-DB3D-0D52-56194C6F1C0A}"/>
+                <a16:creationId xmlns:a16="http://schemas.microsoft.com/office/drawing/2014/main" id="{B20541DB-3AB7-994F-8A03-EF2854548B55}"/>
               </a:ext>
             </a:extLst>
           </p:cNvPr>
@@ -1011,7 +1011,7 @@
           <a:bodyPr/>
           <a:lstStyle/>
           <a:p>
-            <a:fld id="{10E2B5AC-89FB-48EB-9CCF-510AF25C1A40}" type="slidenum">
+            <a:fld id="{CF4FFC3E-1C72-4461-AD55-265BC387821F}" type="slidenum">
               <a:rPr kumimoji="1" lang="ja-JP" altLang="en-US" smtClean="0"/>
               <a:t>‹#›</a:t>
             </a:fld>
@@ -1022,7 +1022,7 @@
     </p:spTree>
     <p:extLst>
       <p:ext uri="{BB962C8B-B14F-4D97-AF65-F5344CB8AC3E}">
-        <p14:creationId xmlns:p14="http://schemas.microsoft.com/office/powerpoint/2010/main" val="271100168"/>
+        <p14:creationId xmlns:p14="http://schemas.microsoft.com/office/powerpoint/2010/main" val="1146734269"/>
       </p:ext>
     </p:extLst>
   </p:cSld>
@@ -1054,7 +1054,7 @@
           <p:cNvPr id="2" name="タイトル 1">
             <a:extLst>
               <a:ext uri="{FF2B5EF4-FFF2-40B4-BE49-F238E27FC236}">
-                <a16:creationId xmlns:a16="http://schemas.microsoft.com/office/drawing/2014/main" id="{1DD5D8F3-431E-0120-FA8B-76583CB8620D}"/>
+                <a16:creationId xmlns:a16="http://schemas.microsoft.com/office/drawing/2014/main" id="{E8D3EF6F-5820-1DC9-427C-DEF1B6B338FC}"/>
               </a:ext>
             </a:extLst>
           </p:cNvPr>
@@ -1091,7 +1091,7 @@
           <p:cNvPr id="3" name="テキスト プレースホルダー 2">
             <a:extLst>
               <a:ext uri="{FF2B5EF4-FFF2-40B4-BE49-F238E27FC236}">
-                <a16:creationId xmlns:a16="http://schemas.microsoft.com/office/drawing/2014/main" id="{2EC7D047-7571-CD2C-AA9F-58EE767E3E8F}"/>
+                <a16:creationId xmlns:a16="http://schemas.microsoft.com/office/drawing/2014/main" id="{9651AEE6-6B90-34C3-4C36-C871EA99DDAE}"/>
               </a:ext>
             </a:extLst>
           </p:cNvPr>
@@ -1216,7 +1216,7 @@
           <p:cNvPr id="4" name="日付プレースホルダー 3">
             <a:extLst>
               <a:ext uri="{FF2B5EF4-FFF2-40B4-BE49-F238E27FC236}">
-                <a16:creationId xmlns:a16="http://schemas.microsoft.com/office/drawing/2014/main" id="{8AA65A3B-A3FE-2F6C-BAE2-EA1566426AC9}"/>
+                <a16:creationId xmlns:a16="http://schemas.microsoft.com/office/drawing/2014/main" id="{968AD235-2ED3-61AE-C05F-EA1670701044}"/>
               </a:ext>
             </a:extLst>
           </p:cNvPr>
@@ -1232,7 +1232,7 @@
           <a:bodyPr/>
           <a:lstStyle/>
           <a:p>
-            <a:fld id="{86E5C8E2-7CC4-4A62-8060-BEAF6303C999}" type="datetimeFigureOut">
+            <a:fld id="{EFF6C402-2530-434A-80B3-CD0197C21F23}" type="datetimeFigureOut">
               <a:rPr kumimoji="1" lang="ja-JP" altLang="en-US" smtClean="0"/>
               <a:t>2026/7/30</a:t>
             </a:fld>
@@ -1245,7 +1245,7 @@
           <p:cNvPr id="5" name="フッター プレースホルダー 4">
             <a:extLst>
               <a:ext uri="{FF2B5EF4-FFF2-40B4-BE49-F238E27FC236}">
-                <a16:creationId xmlns:a16="http://schemas.microsoft.com/office/drawing/2014/main" id="{B68E52AC-CE1C-08EF-5144-41A1BCFBA110}"/>
+                <a16:creationId xmlns:a16="http://schemas.microsoft.com/office/drawing/2014/main" id="{92695E31-356D-3799-1FD4-438DC8ECCE43}"/>
               </a:ext>
             </a:extLst>
           </p:cNvPr>
@@ -1270,7 +1270,7 @@
           <p:cNvPr id="6" name="スライド番号プレースホルダー 5">
             <a:extLst>
               <a:ext uri="{FF2B5EF4-FFF2-40B4-BE49-F238E27FC236}">
-                <a16:creationId xmlns:a16="http://schemas.microsoft.com/office/drawing/2014/main" id="{17A86F7A-37DA-51F1-E235-F49CB0AA301C}"/>
+                <a16:creationId xmlns:a16="http://schemas.microsoft.com/office/drawing/2014/main" id="{3EDD8354-4B01-72FB-2C6B-71A8265BA2A2}"/>
               </a:ext>
             </a:extLst>
           </p:cNvPr>
@@ -1286,7 +1286,7 @@
           <a:bodyPr/>
           <a:lstStyle/>
           <a:p>
-            <a:fld id="{10E2B5AC-89FB-48EB-9CCF-510AF25C1A40}" type="slidenum">
+            <a:fld id="{CF4FFC3E-1C72-4461-AD55-265BC387821F}" type="slidenum">
               <a:rPr kumimoji="1" lang="ja-JP" altLang="en-US" smtClean="0"/>
               <a:t>‹#›</a:t>
             </a:fld>
@@ -1297,7 +1297,7 @@
     </p:spTree>
     <p:extLst>
       <p:ext uri="{BB962C8B-B14F-4D97-AF65-F5344CB8AC3E}">
-        <p14:creationId xmlns:p14="http://schemas.microsoft.com/office/powerpoint/2010/main" val="1767181435"/>
+        <p14:creationId xmlns:p14="http://schemas.microsoft.com/office/powerpoint/2010/main" val="1102639129"/>
       </p:ext>
     </p:extLst>
   </p:cSld>
@@ -1329,7 +1329,7 @@
           <p:cNvPr id="2" name="タイトル 1">
             <a:extLst>
               <a:ext uri="{FF2B5EF4-FFF2-40B4-BE49-F238E27FC236}">
-                <a16:creationId xmlns:a16="http://schemas.microsoft.com/office/drawing/2014/main" id="{1C3DD71F-8867-4448-1AD3-6F0D4F4DA828}"/>
+                <a16:creationId xmlns:a16="http://schemas.microsoft.com/office/drawing/2014/main" id="{52A5F5FF-9ABB-7609-D87F-873CE2C1B2EE}"/>
               </a:ext>
             </a:extLst>
           </p:cNvPr>
@@ -1357,7 +1357,7 @@
           <p:cNvPr id="3" name="コンテンツ プレースホルダー 2">
             <a:extLst>
               <a:ext uri="{FF2B5EF4-FFF2-40B4-BE49-F238E27FC236}">
-                <a16:creationId xmlns:a16="http://schemas.microsoft.com/office/drawing/2014/main" id="{DE2C3D46-C656-3018-1CC1-DAC32CD506B2}"/>
+                <a16:creationId xmlns:a16="http://schemas.microsoft.com/office/drawing/2014/main" id="{C80DD8B7-2CFB-EF2F-CAE3-7C55045F5E76}"/>
               </a:ext>
             </a:extLst>
           </p:cNvPr>
@@ -1451,7 +1451,7 @@
           <p:cNvPr id="4" name="コンテンツ プレースホルダー 3">
             <a:extLst>
               <a:ext uri="{FF2B5EF4-FFF2-40B4-BE49-F238E27FC236}">
-                <a16:creationId xmlns:a16="http://schemas.microsoft.com/office/drawing/2014/main" id="{43FE781A-5446-E1DB-D6EB-9A426408448E}"/>
+                <a16:creationId xmlns:a16="http://schemas.microsoft.com/office/drawing/2014/main" id="{5F28C365-2596-8ED4-7FD9-B51BB4C5082D}"/>
               </a:ext>
             </a:extLst>
           </p:cNvPr>
@@ -1545,7 +1545,7 @@
           <p:cNvPr id="5" name="日付プレースホルダー 4">
             <a:extLst>
               <a:ext uri="{FF2B5EF4-FFF2-40B4-BE49-F238E27FC236}">
-                <a16:creationId xmlns:a16="http://schemas.microsoft.com/office/drawing/2014/main" id="{36BA885E-87FC-5811-E88F-B36EDF37402B}"/>
+                <a16:creationId xmlns:a16="http://schemas.microsoft.com/office/drawing/2014/main" id="{BC32811F-D54A-2C07-A762-EB5097B3DFE9}"/>
               </a:ext>
             </a:extLst>
           </p:cNvPr>
@@ -1561,7 +1561,7 @@
           <a:bodyPr/>
           <a:lstStyle/>
           <a:p>
-            <a:fld id="{86E5C8E2-7CC4-4A62-8060-BEAF6303C999}" type="datetimeFigureOut">
+            <a:fld id="{EFF6C402-2530-434A-80B3-CD0197C21F23}" type="datetimeFigureOut">
               <a:rPr kumimoji="1" lang="ja-JP" altLang="en-US" smtClean="0"/>
               <a:t>2026/7/30</a:t>
             </a:fld>
@@ -1574,7 +1574,7 @@
           <p:cNvPr id="6" name="フッター プレースホルダー 5">
             <a:extLst>
               <a:ext uri="{FF2B5EF4-FFF2-40B4-BE49-F238E27FC236}">
-                <a16:creationId xmlns:a16="http://schemas.microsoft.com/office/drawing/2014/main" id="{8CD386F1-5E80-3FB8-A050-2705206D9E3A}"/>
+                <a16:creationId xmlns:a16="http://schemas.microsoft.com/office/drawing/2014/main" id="{9CBAFA49-7B59-4D16-5FCA-1BAFBA6D00E5}"/>
               </a:ext>
             </a:extLst>
           </p:cNvPr>
@@ -1599,7 +1599,7 @@
           <p:cNvPr id="7" name="スライド番号プレースホルダー 6">
             <a:extLst>
               <a:ext uri="{FF2B5EF4-FFF2-40B4-BE49-F238E27FC236}">
-                <a16:creationId xmlns:a16="http://schemas.microsoft.com/office/drawing/2014/main" id="{D95209EC-C174-8FCF-2061-7111DB08C41F}"/>
+                <a16:creationId xmlns:a16="http://schemas.microsoft.com/office/drawing/2014/main" id="{7C05EE7B-B681-9DB5-94F3-E62387B46A55}"/>
               </a:ext>
             </a:extLst>
           </p:cNvPr>
@@ -1615,7 +1615,7 @@
           <a:bodyPr/>
           <a:lstStyle/>
           <a:p>
-            <a:fld id="{10E2B5AC-89FB-48EB-9CCF-510AF25C1A40}" type="slidenum">
+            <a:fld id="{CF4FFC3E-1C72-4461-AD55-265BC387821F}" type="slidenum">
               <a:rPr kumimoji="1" lang="ja-JP" altLang="en-US" smtClean="0"/>
               <a:t>‹#›</a:t>
             </a:fld>
@@ -1626,7 +1626,7 @@
     </p:spTree>
     <p:extLst>
       <p:ext uri="{BB962C8B-B14F-4D97-AF65-F5344CB8AC3E}">
-        <p14:creationId xmlns:p14="http://schemas.microsoft.com/office/powerpoint/2010/main" val="1667178505"/>
+        <p14:creationId xmlns:p14="http://schemas.microsoft.com/office/powerpoint/2010/main" val="604071912"/>
       </p:ext>
     </p:extLst>
   </p:cSld>
@@ -1658,7 +1658,7 @@
           <p:cNvPr id="2" name="タイトル 1">
             <a:extLst>
               <a:ext uri="{FF2B5EF4-FFF2-40B4-BE49-F238E27FC236}">
-                <a16:creationId xmlns:a16="http://schemas.microsoft.com/office/drawing/2014/main" id="{56EA9587-FFAF-0EAC-2B90-1F6C256F1D3E}"/>
+                <a16:creationId xmlns:a16="http://schemas.microsoft.com/office/drawing/2014/main" id="{BDE21194-B6FF-900A-9549-AF14A958CF9A}"/>
               </a:ext>
             </a:extLst>
           </p:cNvPr>
@@ -1691,7 +1691,7 @@
           <p:cNvPr id="3" name="テキスト プレースホルダー 2">
             <a:extLst>
               <a:ext uri="{FF2B5EF4-FFF2-40B4-BE49-F238E27FC236}">
-                <a16:creationId xmlns:a16="http://schemas.microsoft.com/office/drawing/2014/main" id="{C06893E0-2C10-15C2-3EFD-7F6C38B15419}"/>
+                <a16:creationId xmlns:a16="http://schemas.microsoft.com/office/drawing/2014/main" id="{26ABF61D-FDDF-A542-ED1D-A0B2AAB9314D}"/>
               </a:ext>
             </a:extLst>
           </p:cNvPr>
@@ -1762,7 +1762,7 @@
           <p:cNvPr id="4" name="コンテンツ プレースホルダー 3">
             <a:extLst>
               <a:ext uri="{FF2B5EF4-FFF2-40B4-BE49-F238E27FC236}">
-                <a16:creationId xmlns:a16="http://schemas.microsoft.com/office/drawing/2014/main" id="{914995A3-D47D-207D-BB7E-29BE4835A5AE}"/>
+                <a16:creationId xmlns:a16="http://schemas.microsoft.com/office/drawing/2014/main" id="{DD1364B1-89ED-03E1-4640-41B048E9065B}"/>
               </a:ext>
             </a:extLst>
           </p:cNvPr>
@@ -1856,7 +1856,7 @@
           <p:cNvPr id="5" name="テキスト プレースホルダー 4">
             <a:extLst>
               <a:ext uri="{FF2B5EF4-FFF2-40B4-BE49-F238E27FC236}">
-                <a16:creationId xmlns:a16="http://schemas.microsoft.com/office/drawing/2014/main" id="{3B7ABD24-C5A5-E347-661C-17A9C0E2A85E}"/>
+                <a16:creationId xmlns:a16="http://schemas.microsoft.com/office/drawing/2014/main" id="{5A868F72-1EAE-3BA7-0A16-5E0C83444836}"/>
               </a:ext>
             </a:extLst>
           </p:cNvPr>
@@ -1927,7 +1927,7 @@
           <p:cNvPr id="6" name="コンテンツ プレースホルダー 5">
             <a:extLst>
               <a:ext uri="{FF2B5EF4-FFF2-40B4-BE49-F238E27FC236}">
-                <a16:creationId xmlns:a16="http://schemas.microsoft.com/office/drawing/2014/main" id="{8268FB90-8320-F3EB-C388-60CCB2206557}"/>
+                <a16:creationId xmlns:a16="http://schemas.microsoft.com/office/drawing/2014/main" id="{AEF50383-6610-7F6C-7B03-4A369C07F638}"/>
               </a:ext>
             </a:extLst>
           </p:cNvPr>
@@ -2021,7 +2021,7 @@
           <p:cNvPr id="7" name="日付プレースホルダー 6">
             <a:extLst>
               <a:ext uri="{FF2B5EF4-FFF2-40B4-BE49-F238E27FC236}">
-                <a16:creationId xmlns:a16="http://schemas.microsoft.com/office/drawing/2014/main" id="{CB7A87B4-EB70-32E5-1392-E32F7D50E239}"/>
+                <a16:creationId xmlns:a16="http://schemas.microsoft.com/office/drawing/2014/main" id="{BB66ECDF-0036-4D92-3A81-39C647B38C8C}"/>
               </a:ext>
             </a:extLst>
           </p:cNvPr>
@@ -2037,7 +2037,7 @@
           <a:bodyPr/>
           <a:lstStyle/>
           <a:p>
-            <a:fld id="{86E5C8E2-7CC4-4A62-8060-BEAF6303C999}" type="datetimeFigureOut">
+            <a:fld id="{EFF6C402-2530-434A-80B3-CD0197C21F23}" type="datetimeFigureOut">
               <a:rPr kumimoji="1" lang="ja-JP" altLang="en-US" smtClean="0"/>
               <a:t>2026/7/30</a:t>
             </a:fld>
@@ -2050,7 +2050,7 @@
           <p:cNvPr id="8" name="フッター プレースホルダー 7">
             <a:extLst>
               <a:ext uri="{FF2B5EF4-FFF2-40B4-BE49-F238E27FC236}">
-                <a16:creationId xmlns:a16="http://schemas.microsoft.com/office/drawing/2014/main" id="{B256C973-42B7-281B-6039-0A68EBED0190}"/>
+                <a16:creationId xmlns:a16="http://schemas.microsoft.com/office/drawing/2014/main" id="{478DAF50-2AF2-20AE-2363-0BCEFABCA1AE}"/>
               </a:ext>
             </a:extLst>
           </p:cNvPr>
@@ -2075,7 +2075,7 @@
           <p:cNvPr id="9" name="スライド番号プレースホルダー 8">
             <a:extLst>
               <a:ext uri="{FF2B5EF4-FFF2-40B4-BE49-F238E27FC236}">
-                <a16:creationId xmlns:a16="http://schemas.microsoft.com/office/drawing/2014/main" id="{8DC0D415-AD1F-0FC5-2F74-4F23C6706EDF}"/>
+                <a16:creationId xmlns:a16="http://schemas.microsoft.com/office/drawing/2014/main" id="{8466A3DE-0B0B-E603-4882-7EF3B4A95A4F}"/>
               </a:ext>
             </a:extLst>
           </p:cNvPr>
@@ -2091,7 +2091,7 @@
           <a:bodyPr/>
           <a:lstStyle/>
           <a:p>
-            <a:fld id="{10E2B5AC-89FB-48EB-9CCF-510AF25C1A40}" type="slidenum">
+            <a:fld id="{CF4FFC3E-1C72-4461-AD55-265BC387821F}" type="slidenum">
               <a:rPr kumimoji="1" lang="ja-JP" altLang="en-US" smtClean="0"/>
               <a:t>‹#›</a:t>
             </a:fld>
@@ -2102,7 +2102,7 @@
     </p:spTree>
     <p:extLst>
       <p:ext uri="{BB962C8B-B14F-4D97-AF65-F5344CB8AC3E}">
-        <p14:creationId xmlns:p14="http://schemas.microsoft.com/office/powerpoint/2010/main" val="3551159400"/>
+        <p14:creationId xmlns:p14="http://schemas.microsoft.com/office/powerpoint/2010/main" val="3438064761"/>
       </p:ext>
     </p:extLst>
   </p:cSld>
@@ -2134,7 +2134,7 @@
           <p:cNvPr id="2" name="タイトル 1">
             <a:extLst>
               <a:ext uri="{FF2B5EF4-FFF2-40B4-BE49-F238E27FC236}">
-                <a16:creationId xmlns:a16="http://schemas.microsoft.com/office/drawing/2014/main" id="{1F02A749-AADB-6E3A-699A-284D442F9BB6}"/>
+                <a16:creationId xmlns:a16="http://schemas.microsoft.com/office/drawing/2014/main" id="{98733543-36D3-BE2A-D96E-CBD39644F681}"/>
               </a:ext>
             </a:extLst>
           </p:cNvPr>
@@ -2162,7 +2162,7 @@
           <p:cNvPr id="3" name="日付プレースホルダー 2">
             <a:extLst>
               <a:ext uri="{FF2B5EF4-FFF2-40B4-BE49-F238E27FC236}">
-                <a16:creationId xmlns:a16="http://schemas.microsoft.com/office/drawing/2014/main" id="{C2F35868-0BC8-9A6D-5E6A-86F70F183F64}"/>
+                <a16:creationId xmlns:a16="http://schemas.microsoft.com/office/drawing/2014/main" id="{3A473302-37A6-2347-E0E3-377502871DEC}"/>
               </a:ext>
             </a:extLst>
           </p:cNvPr>
@@ -2178,7 +2178,7 @@
           <a:bodyPr/>
           <a:lstStyle/>
           <a:p>
-            <a:fld id="{86E5C8E2-7CC4-4A62-8060-BEAF6303C999}" type="datetimeFigureOut">
+            <a:fld id="{EFF6C402-2530-434A-80B3-CD0197C21F23}" type="datetimeFigureOut">
               <a:rPr kumimoji="1" lang="ja-JP" altLang="en-US" smtClean="0"/>
               <a:t>2026/7/30</a:t>
             </a:fld>
@@ -2191,7 +2191,7 @@
           <p:cNvPr id="4" name="フッター プレースホルダー 3">
             <a:extLst>
               <a:ext uri="{FF2B5EF4-FFF2-40B4-BE49-F238E27FC236}">
-                <a16:creationId xmlns:a16="http://schemas.microsoft.com/office/drawing/2014/main" id="{10E671A8-A0BC-8CE4-37EA-31FCFB13D664}"/>
+                <a16:creationId xmlns:a16="http://schemas.microsoft.com/office/drawing/2014/main" id="{32697729-42B4-D030-209B-24664DF9CFCB}"/>
               </a:ext>
             </a:extLst>
           </p:cNvPr>
@@ -2216,7 +2216,7 @@
           <p:cNvPr id="5" name="スライド番号プレースホルダー 4">
             <a:extLst>
               <a:ext uri="{FF2B5EF4-FFF2-40B4-BE49-F238E27FC236}">
-                <a16:creationId xmlns:a16="http://schemas.microsoft.com/office/drawing/2014/main" id="{1B474696-9010-AB43-1483-4DEB8B16A691}"/>
+                <a16:creationId xmlns:a16="http://schemas.microsoft.com/office/drawing/2014/main" id="{E8EB13A4-149F-C945-5977-90009597A093}"/>
               </a:ext>
             </a:extLst>
           </p:cNvPr>
@@ -2232,7 +2232,7 @@
           <a:bodyPr/>
           <a:lstStyle/>
           <a:p>
-            <a:fld id="{10E2B5AC-89FB-48EB-9CCF-510AF25C1A40}" type="slidenum">
+            <a:fld id="{CF4FFC3E-1C72-4461-AD55-265BC387821F}" type="slidenum">
               <a:rPr kumimoji="1" lang="ja-JP" altLang="en-US" smtClean="0"/>
               <a:t>‹#›</a:t>
             </a:fld>
@@ -2243,7 +2243,7 @@
     </p:spTree>
     <p:extLst>
       <p:ext uri="{BB962C8B-B14F-4D97-AF65-F5344CB8AC3E}">
-        <p14:creationId xmlns:p14="http://schemas.microsoft.com/office/powerpoint/2010/main" val="2153735072"/>
+        <p14:creationId xmlns:p14="http://schemas.microsoft.com/office/powerpoint/2010/main" val="192678014"/>
       </p:ext>
     </p:extLst>
   </p:cSld>
@@ -2275,7 +2275,7 @@
           <p:cNvPr id="2" name="日付プレースホルダー 1">
             <a:extLst>
               <a:ext uri="{FF2B5EF4-FFF2-40B4-BE49-F238E27FC236}">
-                <a16:creationId xmlns:a16="http://schemas.microsoft.com/office/drawing/2014/main" id="{C4CD5080-BC1F-03B6-CAA3-675AEE0A67E5}"/>
+                <a16:creationId xmlns:a16="http://schemas.microsoft.com/office/drawing/2014/main" id="{C494F396-FEA0-C469-0D0C-D1CED47C3C2A}"/>
               </a:ext>
             </a:extLst>
           </p:cNvPr>
@@ -2291,7 +2291,7 @@
           <a:bodyPr/>
           <a:lstStyle/>
           <a:p>
-            <a:fld id="{86E5C8E2-7CC4-4A62-8060-BEAF6303C999}" type="datetimeFigureOut">
+            <a:fld id="{EFF6C402-2530-434A-80B3-CD0197C21F23}" type="datetimeFigureOut">
               <a:rPr kumimoji="1" lang="ja-JP" altLang="en-US" smtClean="0"/>
               <a:t>2026/7/30</a:t>
             </a:fld>
@@ -2304,7 +2304,7 @@
           <p:cNvPr id="3" name="フッター プレースホルダー 2">
             <a:extLst>
               <a:ext uri="{FF2B5EF4-FFF2-40B4-BE49-F238E27FC236}">
-                <a16:creationId xmlns:a16="http://schemas.microsoft.com/office/drawing/2014/main" id="{163090C8-643C-3219-A620-4221AC5B312E}"/>
+                <a16:creationId xmlns:a16="http://schemas.microsoft.com/office/drawing/2014/main" id="{A84371C5-1DA0-F714-C076-C563B05FE6FB}"/>
               </a:ext>
             </a:extLst>
           </p:cNvPr>
@@ -2329,7 +2329,7 @@
           <p:cNvPr id="4" name="スライド番号プレースホルダー 3">
             <a:extLst>
               <a:ext uri="{FF2B5EF4-FFF2-40B4-BE49-F238E27FC236}">
-                <a16:creationId xmlns:a16="http://schemas.microsoft.com/office/drawing/2014/main" id="{0477BF6B-B0AB-0405-A046-D6B14F3111C7}"/>
+                <a16:creationId xmlns:a16="http://schemas.microsoft.com/office/drawing/2014/main" id="{7615C4B7-D6E0-7B03-B80E-7A222617686A}"/>
               </a:ext>
             </a:extLst>
           </p:cNvPr>
@@ -2345,7 +2345,7 @@
           <a:bodyPr/>
           <a:lstStyle/>
           <a:p>
-            <a:fld id="{10E2B5AC-89FB-48EB-9CCF-510AF25C1A40}" type="slidenum">
+            <a:fld id="{CF4FFC3E-1C72-4461-AD55-265BC387821F}" type="slidenum">
               <a:rPr kumimoji="1" lang="ja-JP" altLang="en-US" smtClean="0"/>
               <a:t>‹#›</a:t>
             </a:fld>
@@ -2356,7 +2356,7 @@
     </p:spTree>
     <p:extLst>
       <p:ext uri="{BB962C8B-B14F-4D97-AF65-F5344CB8AC3E}">
-        <p14:creationId xmlns:p14="http://schemas.microsoft.com/office/powerpoint/2010/main" val="624326403"/>
+        <p14:creationId xmlns:p14="http://schemas.microsoft.com/office/powerpoint/2010/main" val="1170779962"/>
       </p:ext>
     </p:extLst>
   </p:cSld>
@@ -2388,7 +2388,7 @@
           <p:cNvPr id="2" name="タイトル 1">
             <a:extLst>
               <a:ext uri="{FF2B5EF4-FFF2-40B4-BE49-F238E27FC236}">
-                <a16:creationId xmlns:a16="http://schemas.microsoft.com/office/drawing/2014/main" id="{F748F55A-6303-6F8F-3A86-678F0A69B080}"/>
+                <a16:creationId xmlns:a16="http://schemas.microsoft.com/office/drawing/2014/main" id="{B54AACD6-FE47-BCC9-031F-F2858D68804D}"/>
               </a:ext>
             </a:extLst>
           </p:cNvPr>
@@ -2425,7 +2425,7 @@
           <p:cNvPr id="3" name="コンテンツ プレースホルダー 2">
             <a:extLst>
               <a:ext uri="{FF2B5EF4-FFF2-40B4-BE49-F238E27FC236}">
-                <a16:creationId xmlns:a16="http://schemas.microsoft.com/office/drawing/2014/main" id="{7FBD5F5A-CAE9-B64C-8CC2-9EB12812AE1A}"/>
+                <a16:creationId xmlns:a16="http://schemas.microsoft.com/office/drawing/2014/main" id="{9BB83E4A-5C1E-866F-BF4B-5755AC6B59B0}"/>
               </a:ext>
             </a:extLst>
           </p:cNvPr>
@@ -2547,7 +2547,7 @@
           <p:cNvPr id="4" name="テキスト プレースホルダー 3">
             <a:extLst>
               <a:ext uri="{FF2B5EF4-FFF2-40B4-BE49-F238E27FC236}">
-                <a16:creationId xmlns:a16="http://schemas.microsoft.com/office/drawing/2014/main" id="{17E83FC4-B519-DBE2-BC46-5EB754014FE6}"/>
+                <a16:creationId xmlns:a16="http://schemas.microsoft.com/office/drawing/2014/main" id="{15705366-0D21-C99B-CE53-CCA8DC8C1495}"/>
               </a:ext>
             </a:extLst>
           </p:cNvPr>
@@ -2618,7 +2618,7 @@
           <p:cNvPr id="5" name="日付プレースホルダー 4">
             <a:extLst>
               <a:ext uri="{FF2B5EF4-FFF2-40B4-BE49-F238E27FC236}">
-                <a16:creationId xmlns:a16="http://schemas.microsoft.com/office/drawing/2014/main" id="{F3D1CD31-DE60-83FE-8A57-C6A0C5FF2FE8}"/>
+                <a16:creationId xmlns:a16="http://schemas.microsoft.com/office/drawing/2014/main" id="{DCBDE14C-7940-0BA5-AE18-0BE57CD5644A}"/>
               </a:ext>
             </a:extLst>
           </p:cNvPr>
@@ -2634,7 +2634,7 @@
           <a:bodyPr/>
           <a:lstStyle/>
           <a:p>
-            <a:fld id="{86E5C8E2-7CC4-4A62-8060-BEAF6303C999}" type="datetimeFigureOut">
+            <a:fld id="{EFF6C402-2530-434A-80B3-CD0197C21F23}" type="datetimeFigureOut">
               <a:rPr kumimoji="1" lang="ja-JP" altLang="en-US" smtClean="0"/>
               <a:t>2026/7/30</a:t>
             </a:fld>
@@ -2647,7 +2647,7 @@
           <p:cNvPr id="6" name="フッター プレースホルダー 5">
             <a:extLst>
               <a:ext uri="{FF2B5EF4-FFF2-40B4-BE49-F238E27FC236}">
-                <a16:creationId xmlns:a16="http://schemas.microsoft.com/office/drawing/2014/main" id="{5D105DA1-B6A9-6863-96E7-D81BD3D2AC31}"/>
+                <a16:creationId xmlns:a16="http://schemas.microsoft.com/office/drawing/2014/main" id="{1EE493AA-2FBC-A8CC-2017-49378A83225A}"/>
               </a:ext>
             </a:extLst>
           </p:cNvPr>
@@ -2672,7 +2672,7 @@
           <p:cNvPr id="7" name="スライド番号プレースホルダー 6">
             <a:extLst>
               <a:ext uri="{FF2B5EF4-FFF2-40B4-BE49-F238E27FC236}">
-                <a16:creationId xmlns:a16="http://schemas.microsoft.com/office/drawing/2014/main" id="{0904A69F-E757-9416-674D-11C6371FB628}"/>
+                <a16:creationId xmlns:a16="http://schemas.microsoft.com/office/drawing/2014/main" id="{9BFB81C2-916A-BB0E-E12C-7B83AAA9F2A1}"/>
               </a:ext>
             </a:extLst>
           </p:cNvPr>
@@ -2688,7 +2688,7 @@
           <a:bodyPr/>
           <a:lstStyle/>
           <a:p>
-            <a:fld id="{10E2B5AC-89FB-48EB-9CCF-510AF25C1A40}" type="slidenum">
+            <a:fld id="{CF4FFC3E-1C72-4461-AD55-265BC387821F}" type="slidenum">
               <a:rPr kumimoji="1" lang="ja-JP" altLang="en-US" smtClean="0"/>
               <a:t>‹#›</a:t>
             </a:fld>
@@ -2699,7 +2699,7 @@
     </p:spTree>
     <p:extLst>
       <p:ext uri="{BB962C8B-B14F-4D97-AF65-F5344CB8AC3E}">
-        <p14:creationId xmlns:p14="http://schemas.microsoft.com/office/powerpoint/2010/main" val="1223275251"/>
+        <p14:creationId xmlns:p14="http://schemas.microsoft.com/office/powerpoint/2010/main" val="1273908988"/>
       </p:ext>
     </p:extLst>
   </p:cSld>
@@ -2731,7 +2731,7 @@
           <p:cNvPr id="2" name="タイトル 1">
             <a:extLst>
               <a:ext uri="{FF2B5EF4-FFF2-40B4-BE49-F238E27FC236}">
-                <a16:creationId xmlns:a16="http://schemas.microsoft.com/office/drawing/2014/main" id="{0DD0A34A-88EF-6B85-F972-084BA6359EEA}"/>
+                <a16:creationId xmlns:a16="http://schemas.microsoft.com/office/drawing/2014/main" id="{BED13A47-4889-9DDC-819B-A60AE7051838}"/>
               </a:ext>
             </a:extLst>
           </p:cNvPr>
@@ -2768,7 +2768,7 @@
           <p:cNvPr id="3" name="図プレースホルダー 2">
             <a:extLst>
               <a:ext uri="{FF2B5EF4-FFF2-40B4-BE49-F238E27FC236}">
-                <a16:creationId xmlns:a16="http://schemas.microsoft.com/office/drawing/2014/main" id="{91A0E0DC-9ABB-FD7D-D729-C5D933B6EDEB}"/>
+                <a16:creationId xmlns:a16="http://schemas.microsoft.com/office/drawing/2014/main" id="{8CE5E8CD-3F16-9759-B873-5B86DA4F60D3}"/>
               </a:ext>
             </a:extLst>
           </p:cNvPr>
@@ -2835,7 +2835,7 @@
           <p:cNvPr id="4" name="テキスト プレースホルダー 3">
             <a:extLst>
               <a:ext uri="{FF2B5EF4-FFF2-40B4-BE49-F238E27FC236}">
-                <a16:creationId xmlns:a16="http://schemas.microsoft.com/office/drawing/2014/main" id="{A196465B-206A-E90A-961F-66D3ED79C80E}"/>
+                <a16:creationId xmlns:a16="http://schemas.microsoft.com/office/drawing/2014/main" id="{40AF2BAF-EB12-02C3-6BFB-06FB1C99B882}"/>
               </a:ext>
             </a:extLst>
           </p:cNvPr>
@@ -2906,7 +2906,7 @@
           <p:cNvPr id="5" name="日付プレースホルダー 4">
             <a:extLst>
               <a:ext uri="{FF2B5EF4-FFF2-40B4-BE49-F238E27FC236}">
-                <a16:creationId xmlns:a16="http://schemas.microsoft.com/office/drawing/2014/main" id="{935950BE-4E67-D026-89F8-6782F6351B12}"/>
+                <a16:creationId xmlns:a16="http://schemas.microsoft.com/office/drawing/2014/main" id="{6737FEBB-99AC-5FF8-243F-49DC38EE9437}"/>
               </a:ext>
             </a:extLst>
           </p:cNvPr>
@@ -2922,7 +2922,7 @@
           <a:bodyPr/>
           <a:lstStyle/>
           <a:p>
-            <a:fld id="{86E5C8E2-7CC4-4A62-8060-BEAF6303C999}" type="datetimeFigureOut">
+            <a:fld id="{EFF6C402-2530-434A-80B3-CD0197C21F23}" type="datetimeFigureOut">
               <a:rPr kumimoji="1" lang="ja-JP" altLang="en-US" smtClean="0"/>
               <a:t>2026/7/30</a:t>
             </a:fld>
@@ -2935,7 +2935,7 @@
           <p:cNvPr id="6" name="フッター プレースホルダー 5">
             <a:extLst>
               <a:ext uri="{FF2B5EF4-FFF2-40B4-BE49-F238E27FC236}">
-                <a16:creationId xmlns:a16="http://schemas.microsoft.com/office/drawing/2014/main" id="{EF13715C-823A-7C5E-9F5B-E7EE84C6CEE6}"/>
+                <a16:creationId xmlns:a16="http://schemas.microsoft.com/office/drawing/2014/main" id="{D0CBD8E8-C983-EE1F-6DEC-5E6213ADB781}"/>
               </a:ext>
             </a:extLst>
           </p:cNvPr>
@@ -2960,7 +2960,7 @@
           <p:cNvPr id="7" name="スライド番号プレースホルダー 6">
             <a:extLst>
               <a:ext uri="{FF2B5EF4-FFF2-40B4-BE49-F238E27FC236}">
-                <a16:creationId xmlns:a16="http://schemas.microsoft.com/office/drawing/2014/main" id="{70A3BAB1-B099-A7A3-45D6-CDBF7AD5A419}"/>
+                <a16:creationId xmlns:a16="http://schemas.microsoft.com/office/drawing/2014/main" id="{F4B374D4-04E8-0DA4-010F-C96C937B4EC5}"/>
               </a:ext>
             </a:extLst>
           </p:cNvPr>
@@ -2976,7 +2976,7 @@
           <a:bodyPr/>
           <a:lstStyle/>
           <a:p>
-            <a:fld id="{10E2B5AC-89FB-48EB-9CCF-510AF25C1A40}" type="slidenum">
+            <a:fld id="{CF4FFC3E-1C72-4461-AD55-265BC387821F}" type="slidenum">
               <a:rPr kumimoji="1" lang="ja-JP" altLang="en-US" smtClean="0"/>
               <a:t>‹#›</a:t>
             </a:fld>
@@ -2987,7 +2987,7 @@
     </p:spTree>
     <p:extLst>
       <p:ext uri="{BB962C8B-B14F-4D97-AF65-F5344CB8AC3E}">
-        <p14:creationId xmlns:p14="http://schemas.microsoft.com/office/powerpoint/2010/main" val="2683127156"/>
+        <p14:creationId xmlns:p14="http://schemas.microsoft.com/office/powerpoint/2010/main" val="3763571145"/>
       </p:ext>
     </p:extLst>
   </p:cSld>
@@ -3024,7 +3024,7 @@
           <p:cNvPr id="2" name="タイトル プレースホルダー 1">
             <a:extLst>
               <a:ext uri="{FF2B5EF4-FFF2-40B4-BE49-F238E27FC236}">
-                <a16:creationId xmlns:a16="http://schemas.microsoft.com/office/drawing/2014/main" id="{79407B66-DF99-335F-319E-9EE1C4897F95}"/>
+                <a16:creationId xmlns:a16="http://schemas.microsoft.com/office/drawing/2014/main" id="{E471E529-5888-1E26-B02C-519630DC2ADE}"/>
               </a:ext>
             </a:extLst>
           </p:cNvPr>
@@ -3062,7 +3062,7 @@
           <p:cNvPr id="3" name="テキスト プレースホルダー 2">
             <a:extLst>
               <a:ext uri="{FF2B5EF4-FFF2-40B4-BE49-F238E27FC236}">
-                <a16:creationId xmlns:a16="http://schemas.microsoft.com/office/drawing/2014/main" id="{C7186CF4-F0A9-581E-1D15-12F49785FD1B}"/>
+                <a16:creationId xmlns:a16="http://schemas.microsoft.com/office/drawing/2014/main" id="{C6E1CB19-06DE-1BD4-30D0-AFE46FA3A229}"/>
               </a:ext>
             </a:extLst>
           </p:cNvPr>
@@ -3161,7 +3161,7 @@
           <p:cNvPr id="4" name="日付プレースホルダー 3">
             <a:extLst>
               <a:ext uri="{FF2B5EF4-FFF2-40B4-BE49-F238E27FC236}">
-                <a16:creationId xmlns:a16="http://schemas.microsoft.com/office/drawing/2014/main" id="{48182746-7CFB-D71F-92AD-AFCBF8F6B594}"/>
+                <a16:creationId xmlns:a16="http://schemas.microsoft.com/office/drawing/2014/main" id="{E5E3C012-20A3-ED1A-0931-247AB6EB12ED}"/>
               </a:ext>
             </a:extLst>
           </p:cNvPr>
@@ -3195,7 +3195,7 @@
             </a:lvl1pPr>
           </a:lstStyle>
           <a:p>
-            <a:fld id="{86E5C8E2-7CC4-4A62-8060-BEAF6303C999}" type="datetimeFigureOut">
+            <a:fld id="{EFF6C402-2530-434A-80B3-CD0197C21F23}" type="datetimeFigureOut">
               <a:rPr kumimoji="1" lang="ja-JP" altLang="en-US" smtClean="0"/>
               <a:t>2026/7/30</a:t>
             </a:fld>
@@ -3208,7 +3208,7 @@
           <p:cNvPr id="5" name="フッター プレースホルダー 4">
             <a:extLst>
               <a:ext uri="{FF2B5EF4-FFF2-40B4-BE49-F238E27FC236}">
-                <a16:creationId xmlns:a16="http://schemas.microsoft.com/office/drawing/2014/main" id="{A99AE6DF-F0A0-DDCD-8404-18B4C0A876AC}"/>
+                <a16:creationId xmlns:a16="http://schemas.microsoft.com/office/drawing/2014/main" id="{1DE902DD-D416-0C64-6CA1-3EAF45D08E94}"/>
               </a:ext>
             </a:extLst>
           </p:cNvPr>
@@ -3251,7 +3251,7 @@
           <p:cNvPr id="6" name="スライド番号プレースホルダー 5">
             <a:extLst>
               <a:ext uri="{FF2B5EF4-FFF2-40B4-BE49-F238E27FC236}">
-                <a16:creationId xmlns:a16="http://schemas.microsoft.com/office/drawing/2014/main" id="{642FC4C1-4F93-1F38-8788-1060CC452A5D}"/>
+                <a16:creationId xmlns:a16="http://schemas.microsoft.com/office/drawing/2014/main" id="{7DD40FA9-9469-59A5-E8E0-BCD0A2FE7BBE}"/>
               </a:ext>
             </a:extLst>
           </p:cNvPr>
@@ -3285,7 +3285,7 @@
             </a:lvl1pPr>
           </a:lstStyle>
           <a:p>
-            <a:fld id="{10E2B5AC-89FB-48EB-9CCF-510AF25C1A40}" type="slidenum">
+            <a:fld id="{CF4FFC3E-1C72-4461-AD55-265BC387821F}" type="slidenum">
               <a:rPr kumimoji="1" lang="ja-JP" altLang="en-US" smtClean="0"/>
               <a:t>‹#›</a:t>
             </a:fld>
@@ -3296,7 +3296,7 @@
     </p:spTree>
     <p:extLst>
       <p:ext uri="{BB962C8B-B14F-4D97-AF65-F5344CB8AC3E}">
-        <p14:creationId xmlns:p14="http://schemas.microsoft.com/office/powerpoint/2010/main" val="2966917628"/>
+        <p14:creationId xmlns:p14="http://schemas.microsoft.com/office/powerpoint/2010/main" val="1474092288"/>
       </p:ext>
     </p:extLst>
   </p:cSld>
@@ -3619,7 +3619,7 @@
           <p:cNvPr id="2" name="テキスト ボックス 1">
             <a:extLst>
               <a:ext uri="{FF2B5EF4-FFF2-40B4-BE49-F238E27FC236}">
-                <a16:creationId xmlns:a16="http://schemas.microsoft.com/office/drawing/2014/main" id="{4657561A-B0E0-CD13-24AC-67630F609525}"/>
+                <a16:creationId xmlns:a16="http://schemas.microsoft.com/office/drawing/2014/main" id="{0D24CE99-8920-4FFD-03E4-28B5F6519433}"/>
               </a:ext>
             </a:extLst>
           </p:cNvPr>
@@ -3665,7 +3665,7 @@
           <p:cNvPr id="3" name="テキスト ボックス 2">
             <a:extLst>
               <a:ext uri="{FF2B5EF4-FFF2-40B4-BE49-F238E27FC236}">
-                <a16:creationId xmlns:a16="http://schemas.microsoft.com/office/drawing/2014/main" id="{E56420BF-EFCB-DB8A-D9BB-A6D90FB6DD5D}"/>
+                <a16:creationId xmlns:a16="http://schemas.microsoft.com/office/drawing/2014/main" id="{2791D2D0-046E-03C0-DD8A-E9EB42EB088A}"/>
               </a:ext>
             </a:extLst>
           </p:cNvPr>
@@ -3714,7 +3714,7 @@
           <p:cNvPr id="4" name="テキスト ボックス 3">
             <a:extLst>
               <a:ext uri="{FF2B5EF4-FFF2-40B4-BE49-F238E27FC236}">
-                <a16:creationId xmlns:a16="http://schemas.microsoft.com/office/drawing/2014/main" id="{CEB5C507-E188-4A18-5F04-76EE0CF36F75}"/>
+                <a16:creationId xmlns:a16="http://schemas.microsoft.com/office/drawing/2014/main" id="{DAC8F617-E77F-4C05-52B9-33B3C66FF4A3}"/>
               </a:ext>
             </a:extLst>
           </p:cNvPr>
@@ -3754,7 +3754,7 @@
           <p:cNvPr id="5" name="テキスト ボックス 4">
             <a:extLst>
               <a:ext uri="{FF2B5EF4-FFF2-40B4-BE49-F238E27FC236}">
-                <a16:creationId xmlns:a16="http://schemas.microsoft.com/office/drawing/2014/main" id="{308DA5D2-ECFD-9990-9B5E-96621B203440}"/>
+                <a16:creationId xmlns:a16="http://schemas.microsoft.com/office/drawing/2014/main" id="{9FCEC0AB-CEF9-72F4-67E5-8BD12EAC7B51}"/>
               </a:ext>
             </a:extLst>
           </p:cNvPr>
@@ -3801,7 +3801,7 @@
             <a:hlinkClick r:id="" action="ppaction://media"/>
             <a:extLst>
               <a:ext uri="{FF2B5EF4-FFF2-40B4-BE49-F238E27FC236}">
-                <a16:creationId xmlns:a16="http://schemas.microsoft.com/office/drawing/2014/main" id="{37423383-8DC3-BA1A-E860-C86315A60D85}"/>
+                <a16:creationId xmlns:a16="http://schemas.microsoft.com/office/drawing/2014/main" id="{37AC79F7-E3CF-28DE-3FD4-F99B96FE1BEA}"/>
               </a:ext>
             </a:extLst>
           </p:cNvPr>
@@ -3836,7 +3836,7 @@
     </p:spTree>
     <p:extLst>
       <p:ext uri="{BB962C8B-B14F-4D97-AF65-F5344CB8AC3E}">
-        <p14:creationId xmlns:p14="http://schemas.microsoft.com/office/powerpoint/2010/main" val="3708204076"/>
+        <p14:creationId xmlns:p14="http://schemas.microsoft.com/office/powerpoint/2010/main" val="3166132793"/>
       </p:ext>
     </p:extLst>
   </p:cSld>
@@ -3960,7 +3960,7 @@
           <p:cNvPr id="2" name="テキスト ボックス 1">
             <a:extLst>
               <a:ext uri="{FF2B5EF4-FFF2-40B4-BE49-F238E27FC236}">
-                <a16:creationId xmlns:a16="http://schemas.microsoft.com/office/drawing/2014/main" id="{FBB93F02-61DF-AAE5-8D3B-81EDBE44A806}"/>
+                <a16:creationId xmlns:a16="http://schemas.microsoft.com/office/drawing/2014/main" id="{544079ED-D12D-575D-D54D-2501EE44A31A}"/>
               </a:ext>
             </a:extLst>
           </p:cNvPr>
@@ -4006,7 +4006,7 @@
           <p:cNvPr id="3" name="テキスト ボックス 2">
             <a:extLst>
               <a:ext uri="{FF2B5EF4-FFF2-40B4-BE49-F238E27FC236}">
-                <a16:creationId xmlns:a16="http://schemas.microsoft.com/office/drawing/2014/main" id="{BF110D86-F6A0-66E6-A2E6-EA54E6FDB610}"/>
+                <a16:creationId xmlns:a16="http://schemas.microsoft.com/office/drawing/2014/main" id="{E0AE8E34-7481-3244-F501-2B8BCA54F8E4}"/>
               </a:ext>
             </a:extLst>
           </p:cNvPr>
@@ -4046,7 +4046,7 @@
           <p:cNvPr id="4" name="テキスト ボックス 3">
             <a:extLst>
               <a:ext uri="{FF2B5EF4-FFF2-40B4-BE49-F238E27FC236}">
-                <a16:creationId xmlns:a16="http://schemas.microsoft.com/office/drawing/2014/main" id="{95BFFF1A-EDB4-7830-E10C-4EFC45DB94D2}"/>
+                <a16:creationId xmlns:a16="http://schemas.microsoft.com/office/drawing/2014/main" id="{B5AE5337-79F1-7AB6-4C4B-D175F810A825}"/>
               </a:ext>
             </a:extLst>
           </p:cNvPr>
@@ -4076,14 +4076,17 @@
                 </a:solidFill>
                 <a:latin typeface="Arial" panose="020B0604020202020204" pitchFamily="34" charset="0"/>
               </a:rPr>
-              <a:t>This is a Next</a:t>
-            </a:r>
-            <a:endParaRPr kumimoji="1" lang="ja-JP" altLang="en-US" sz="2000">
-              <a:solidFill>
-                <a:srgbClr val="333333"/>
-              </a:solidFill>
-              <a:latin typeface="Arial" panose="020B0604020202020204" pitchFamily="34" charset="0"/>
-            </a:endParaRPr>
+              <a:t>Autohensei</a:t>
+            </a:r>
+            <a:r>
+              <a:rPr kumimoji="1" lang="ja-JP" altLang="en-US" sz="2000">
+                <a:solidFill>
+                  <a:srgbClr val="333333"/>
+                </a:solidFill>
+                <a:latin typeface="Arial" panose="020B0604020202020204" pitchFamily="34" charset="0"/>
+              </a:rPr>
+              <a:t>の目的、構成、実装を公開コードから確認できるプロジェクトです。</a:t>
+            </a:r>
           </a:p>
         </p:txBody>
       </p:sp>
@@ -4092,7 +4095,7 @@
           <p:cNvPr id="5" name="テキスト ボックス 4">
             <a:extLst>
               <a:ext uri="{FF2B5EF4-FFF2-40B4-BE49-F238E27FC236}">
-                <a16:creationId xmlns:a16="http://schemas.microsoft.com/office/drawing/2014/main" id="{831C00F4-715A-8891-121C-0F27905110F3}"/>
+                <a16:creationId xmlns:a16="http://schemas.microsoft.com/office/drawing/2014/main" id="{63DDB254-9B09-BF6A-E40A-5F70EE6A2D84}"/>
               </a:ext>
             </a:extLst>
           </p:cNvPr>
@@ -4139,7 +4142,7 @@
             <a:hlinkClick r:id="" action="ppaction://media"/>
             <a:extLst>
               <a:ext uri="{FF2B5EF4-FFF2-40B4-BE49-F238E27FC236}">
-                <a16:creationId xmlns:a16="http://schemas.microsoft.com/office/drawing/2014/main" id="{705C1234-C675-8454-88A5-A3948CCA6C7F}"/>
+                <a16:creationId xmlns:a16="http://schemas.microsoft.com/office/drawing/2014/main" id="{C433BD2A-1875-8073-BC10-E787A120722B}"/>
               </a:ext>
             </a:extLst>
           </p:cNvPr>
@@ -4174,7 +4177,7 @@
     </p:spTree>
     <p:extLst>
       <p:ext uri="{BB962C8B-B14F-4D97-AF65-F5344CB8AC3E}">
-        <p14:creationId xmlns:p14="http://schemas.microsoft.com/office/powerpoint/2010/main" val="646821939"/>
+        <p14:creationId xmlns:p14="http://schemas.microsoft.com/office/powerpoint/2010/main" val="3509105146"/>
       </p:ext>
     </p:extLst>
   </p:cSld>
@@ -4183,10 +4186,10 @@
   </p:clrMapOvr>
   <mc:AlternateContent xmlns:mc="http://schemas.openxmlformats.org/markup-compatibility/2006">
     <mc:Choice xmlns:p14="http://schemas.microsoft.com/office/powerpoint/2010/main" Requires="p14">
-      <p:transition spd="slow" p14:dur="2000" advTm="5000"/>
+      <p:transition spd="slow" p14:dur="2000" advTm="8000"/>
     </mc:Choice>
     <mc:Fallback>
-      <p:transition spd="slow" advTm="5000"/>
+      <p:transition spd="slow" advTm="8000"/>
     </mc:Fallback>
   </mc:AlternateContent>
   <p:timing>
@@ -4217,7 +4220,7 @@
                                   <p:childTnLst>
                                     <p:cmd type="call" cmd="playFrom(0.0)">
                                       <p:cBhvr>
-                                        <p:cTn id="6" dur="2148" fill="hold"/>
+                                        <p:cTn id="6" dur="7076" fill="hold"/>
                                         <p:tgtEl>
                                           <p:spTgt spid="6"/>
                                         </p:tgtEl>
@@ -4298,7 +4301,7 @@
           <p:cNvPr id="2" name="テキスト ボックス 1">
             <a:extLst>
               <a:ext uri="{FF2B5EF4-FFF2-40B4-BE49-F238E27FC236}">
-                <a16:creationId xmlns:a16="http://schemas.microsoft.com/office/drawing/2014/main" id="{9DF80867-A4FF-A367-2BA6-6464D395BFE8}"/>
+                <a16:creationId xmlns:a16="http://schemas.microsoft.com/office/drawing/2014/main" id="{2FAF52A5-E03A-98B2-C3A0-092AA550759F}"/>
               </a:ext>
             </a:extLst>
           </p:cNvPr>
@@ -4344,7 +4347,7 @@
           <p:cNvPr id="3" name="テキスト ボックス 2">
             <a:extLst>
               <a:ext uri="{FF2B5EF4-FFF2-40B4-BE49-F238E27FC236}">
-                <a16:creationId xmlns:a16="http://schemas.microsoft.com/office/drawing/2014/main" id="{8064A4B1-AC05-C6A6-601B-B9E446AC5994}"/>
+                <a16:creationId xmlns:a16="http://schemas.microsoft.com/office/drawing/2014/main" id="{A6C58684-B08F-045A-8453-1ABD1DCB95C4}"/>
               </a:ext>
             </a:extLst>
           </p:cNvPr>
@@ -4384,7 +4387,7 @@
           <p:cNvPr id="4" name="テキスト ボックス 3">
             <a:extLst>
               <a:ext uri="{FF2B5EF4-FFF2-40B4-BE49-F238E27FC236}">
-                <a16:creationId xmlns:a16="http://schemas.microsoft.com/office/drawing/2014/main" id="{6FA70160-61D3-2D95-742B-4F58786053F1}"/>
+                <a16:creationId xmlns:a16="http://schemas.microsoft.com/office/drawing/2014/main" id="{AEA026AE-C815-52CA-851C-C8A9BB30B8F8}"/>
               </a:ext>
             </a:extLst>
           </p:cNvPr>
@@ -4479,7 +4482,7 @@
           <p:cNvPr id="5" name="テキスト ボックス 4">
             <a:extLst>
               <a:ext uri="{FF2B5EF4-FFF2-40B4-BE49-F238E27FC236}">
-                <a16:creationId xmlns:a16="http://schemas.microsoft.com/office/drawing/2014/main" id="{107B622F-797E-4488-C468-1CE0F20C0F59}"/>
+                <a16:creationId xmlns:a16="http://schemas.microsoft.com/office/drawing/2014/main" id="{4E84AE68-BD57-EE0A-F43F-C3B049A9CECE}"/>
               </a:ext>
             </a:extLst>
           </p:cNvPr>
@@ -4526,7 +4529,7 @@
             <a:hlinkClick r:id="" action="ppaction://media"/>
             <a:extLst>
               <a:ext uri="{FF2B5EF4-FFF2-40B4-BE49-F238E27FC236}">
-                <a16:creationId xmlns:a16="http://schemas.microsoft.com/office/drawing/2014/main" id="{14B26585-64A2-85F4-EBFE-F1A13703B649}"/>
+                <a16:creationId xmlns:a16="http://schemas.microsoft.com/office/drawing/2014/main" id="{B8F41858-05DA-C161-8A25-2527D037244B}"/>
               </a:ext>
             </a:extLst>
           </p:cNvPr>
@@ -4561,7 +4564,7 @@
     </p:spTree>
     <p:extLst>
       <p:ext uri="{BB962C8B-B14F-4D97-AF65-F5344CB8AC3E}">
-        <p14:creationId xmlns:p14="http://schemas.microsoft.com/office/powerpoint/2010/main" val="260047714"/>
+        <p14:creationId xmlns:p14="http://schemas.microsoft.com/office/powerpoint/2010/main" val="3891502177"/>
       </p:ext>
     </p:extLst>
   </p:cSld>
@@ -4685,7 +4688,7 @@
           <p:cNvPr id="2" name="テキスト ボックス 1">
             <a:extLst>
               <a:ext uri="{FF2B5EF4-FFF2-40B4-BE49-F238E27FC236}">
-                <a16:creationId xmlns:a16="http://schemas.microsoft.com/office/drawing/2014/main" id="{1EAFFB3B-1EE1-0159-E36A-750C00895EF3}"/>
+                <a16:creationId xmlns:a16="http://schemas.microsoft.com/office/drawing/2014/main" id="{4BD072FA-C9D6-7370-077C-69AE99AA5FBA}"/>
               </a:ext>
             </a:extLst>
           </p:cNvPr>
@@ -4731,7 +4734,7 @@
           <p:cNvPr id="3" name="テキスト ボックス 2">
             <a:extLst>
               <a:ext uri="{FF2B5EF4-FFF2-40B4-BE49-F238E27FC236}">
-                <a16:creationId xmlns:a16="http://schemas.microsoft.com/office/drawing/2014/main" id="{9214D01C-3624-6ADA-53DC-D5834C6F73E5}"/>
+                <a16:creationId xmlns:a16="http://schemas.microsoft.com/office/drawing/2014/main" id="{48721EAB-623B-63B4-F15B-9CC66AD2DA9B}"/>
               </a:ext>
             </a:extLst>
           </p:cNvPr>
@@ -4771,7 +4774,7 @@
           <p:cNvPr id="4" name="テキスト ボックス 3">
             <a:extLst>
               <a:ext uri="{FF2B5EF4-FFF2-40B4-BE49-F238E27FC236}">
-                <a16:creationId xmlns:a16="http://schemas.microsoft.com/office/drawing/2014/main" id="{EC99D6E6-92BD-8F81-D059-3EC926F14D70}"/>
+                <a16:creationId xmlns:a16="http://schemas.microsoft.com/office/drawing/2014/main" id="{7E901ED0-CC65-3A52-1FBB-822ADAD5B1DC}"/>
               </a:ext>
             </a:extLst>
           </p:cNvPr>
@@ -4881,7 +4884,7 @@
           <p:cNvPr id="5" name="テキスト ボックス 4">
             <a:extLst>
               <a:ext uri="{FF2B5EF4-FFF2-40B4-BE49-F238E27FC236}">
-                <a16:creationId xmlns:a16="http://schemas.microsoft.com/office/drawing/2014/main" id="{145C8378-10EE-2C70-BB37-86E69957D0E7}"/>
+                <a16:creationId xmlns:a16="http://schemas.microsoft.com/office/drawing/2014/main" id="{6EFC4997-1FCA-5E58-EAC8-33429A96CA7C}"/>
               </a:ext>
             </a:extLst>
           </p:cNvPr>
@@ -4928,7 +4931,7 @@
             <a:hlinkClick r:id="" action="ppaction://media"/>
             <a:extLst>
               <a:ext uri="{FF2B5EF4-FFF2-40B4-BE49-F238E27FC236}">
-                <a16:creationId xmlns:a16="http://schemas.microsoft.com/office/drawing/2014/main" id="{FF034544-7542-3EF3-9D28-73059F46567A}"/>
+                <a16:creationId xmlns:a16="http://schemas.microsoft.com/office/drawing/2014/main" id="{8215FC35-DEA8-3C28-D935-40672E6BFA19}"/>
               </a:ext>
             </a:extLst>
           </p:cNvPr>
@@ -4963,7 +4966,7 @@
     </p:spTree>
     <p:extLst>
       <p:ext uri="{BB962C8B-B14F-4D97-AF65-F5344CB8AC3E}">
-        <p14:creationId xmlns:p14="http://schemas.microsoft.com/office/powerpoint/2010/main" val="574987850"/>
+        <p14:creationId xmlns:p14="http://schemas.microsoft.com/office/powerpoint/2010/main" val="1633301667"/>
       </p:ext>
     </p:extLst>
   </p:cSld>
@@ -5087,7 +5090,7 @@
           <p:cNvPr id="2" name="テキスト ボックス 1">
             <a:extLst>
               <a:ext uri="{FF2B5EF4-FFF2-40B4-BE49-F238E27FC236}">
-                <a16:creationId xmlns:a16="http://schemas.microsoft.com/office/drawing/2014/main" id="{8D537C35-22E0-573A-C3A7-2DE94687EF01}"/>
+                <a16:creationId xmlns:a16="http://schemas.microsoft.com/office/drawing/2014/main" id="{B6DC1742-7AB0-E45E-1579-D64E2361AA1B}"/>
               </a:ext>
             </a:extLst>
           </p:cNvPr>
@@ -5133,7 +5136,7 @@
           <p:cNvPr id="3" name="テキスト ボックス 2">
             <a:extLst>
               <a:ext uri="{FF2B5EF4-FFF2-40B4-BE49-F238E27FC236}">
-                <a16:creationId xmlns:a16="http://schemas.microsoft.com/office/drawing/2014/main" id="{DE9034C5-2D5F-1FF9-AD76-C855EE259DCF}"/>
+                <a16:creationId xmlns:a16="http://schemas.microsoft.com/office/drawing/2014/main" id="{E64F94DD-0301-2D54-7045-588D80417D25}"/>
               </a:ext>
             </a:extLst>
           </p:cNvPr>
@@ -5173,7 +5176,7 @@
           <p:cNvPr id="4" name="テキスト ボックス 3">
             <a:extLst>
               <a:ext uri="{FF2B5EF4-FFF2-40B4-BE49-F238E27FC236}">
-                <a16:creationId xmlns:a16="http://schemas.microsoft.com/office/drawing/2014/main" id="{CDC735C6-5AB1-6F91-EFDE-546E0DE58B16}"/>
+                <a16:creationId xmlns:a16="http://schemas.microsoft.com/office/drawing/2014/main" id="{C3B30CE2-E4FE-5B5A-ABD6-8A5AF3223EE2}"/>
               </a:ext>
             </a:extLst>
           </p:cNvPr>
@@ -5197,20 +5200,14 @@
           <a:lstStyle/>
           <a:p>
             <a:r>
-              <a:rPr kumimoji="1" lang="en-US" altLang="ja-JP" sz="2000">
+              <a:rPr kumimoji="1" lang="ja-JP" altLang="en-US" sz="2000">
                 <a:solidFill>
                   <a:srgbClr val="333333"/>
                 </a:solidFill>
                 <a:latin typeface="Arial" panose="020B0604020202020204" pitchFamily="34" charset="0"/>
               </a:rPr>
-              <a:t>Initial DQ Walk free-to-play / auto-battle composition guide</a:t>
-            </a:r>
-            <a:endParaRPr kumimoji="1" lang="ja-JP" altLang="en-US" sz="2000">
-              <a:solidFill>
-                <a:srgbClr val="333333"/>
-              </a:solidFill>
-              <a:latin typeface="Arial" panose="020B0604020202020204" pitchFamily="34" charset="0"/>
-            </a:endParaRPr>
+              <a:t>直近のコミットでは、プロジェクトの初期構成と開発基盤が整備されました。</a:t>
+            </a:r>
           </a:p>
         </p:txBody>
       </p:sp>
@@ -5219,7 +5216,7 @@
           <p:cNvPr id="5" name="テキスト ボックス 4">
             <a:extLst>
               <a:ext uri="{FF2B5EF4-FFF2-40B4-BE49-F238E27FC236}">
-                <a16:creationId xmlns:a16="http://schemas.microsoft.com/office/drawing/2014/main" id="{7DE7E487-1524-59DE-7C52-A7815B3E35C6}"/>
+                <a16:creationId xmlns:a16="http://schemas.microsoft.com/office/drawing/2014/main" id="{F2D39865-E2B3-D6EC-86CD-96C65A54D749}"/>
               </a:ext>
             </a:extLst>
           </p:cNvPr>
@@ -5266,7 +5263,7 @@
             <a:hlinkClick r:id="" action="ppaction://media"/>
             <a:extLst>
               <a:ext uri="{FF2B5EF4-FFF2-40B4-BE49-F238E27FC236}">
-                <a16:creationId xmlns:a16="http://schemas.microsoft.com/office/drawing/2014/main" id="{D0142719-25BB-74B8-8FFE-27650E477941}"/>
+                <a16:creationId xmlns:a16="http://schemas.microsoft.com/office/drawing/2014/main" id="{BE7C2CD1-A300-9255-98AC-6200A971DD63}"/>
               </a:ext>
             </a:extLst>
           </p:cNvPr>
@@ -5301,7 +5298,7 @@
     </p:spTree>
     <p:extLst>
       <p:ext uri="{BB962C8B-B14F-4D97-AF65-F5344CB8AC3E}">
-        <p14:creationId xmlns:p14="http://schemas.microsoft.com/office/powerpoint/2010/main" val="3748890160"/>
+        <p14:creationId xmlns:p14="http://schemas.microsoft.com/office/powerpoint/2010/main" val="110326036"/>
       </p:ext>
     </p:extLst>
   </p:cSld>
@@ -5310,10 +5307,10 @@
   </p:clrMapOvr>
   <mc:AlternateContent xmlns:mc="http://schemas.openxmlformats.org/markup-compatibility/2006">
     <mc:Choice xmlns:p14="http://schemas.microsoft.com/office/powerpoint/2010/main" Requires="p14">
-      <p:transition spd="slow" p14:dur="2000" advTm="9000"/>
+      <p:transition spd="slow" p14:dur="2000" advTm="7000"/>
     </mc:Choice>
     <mc:Fallback>
-      <p:transition spd="slow" advTm="9000"/>
+      <p:transition spd="slow" advTm="7000"/>
     </mc:Fallback>
   </mc:AlternateContent>
   <p:timing>
@@ -5344,7 +5341,7 @@
                                   <p:childTnLst>
                                     <p:cmd type="call" cmd="playFrom(0.0)">
                                       <p:cBhvr>
-                                        <p:cTn id="6" dur="8085" fill="hold"/>
+                                        <p:cTn id="6" dur="6126" fill="hold"/>
                                         <p:tgtEl>
                                           <p:spTgt spid="6"/>
                                         </p:tgtEl>
@@ -5425,7 +5422,7 @@
           <p:cNvPr id="2" name="テキスト ボックス 1">
             <a:extLst>
               <a:ext uri="{FF2B5EF4-FFF2-40B4-BE49-F238E27FC236}">
-                <a16:creationId xmlns:a16="http://schemas.microsoft.com/office/drawing/2014/main" id="{2D148E3F-FA31-846E-9CD4-0270D7711FAF}"/>
+                <a16:creationId xmlns:a16="http://schemas.microsoft.com/office/drawing/2014/main" id="{E8DA9B14-A36F-BF00-855D-281966CF73B1}"/>
               </a:ext>
             </a:extLst>
           </p:cNvPr>
@@ -5471,7 +5468,7 @@
           <p:cNvPr id="3" name="テキスト ボックス 2">
             <a:extLst>
               <a:ext uri="{FF2B5EF4-FFF2-40B4-BE49-F238E27FC236}">
-                <a16:creationId xmlns:a16="http://schemas.microsoft.com/office/drawing/2014/main" id="{44B35A20-8CDA-7236-DA89-551812F50DA8}"/>
+                <a16:creationId xmlns:a16="http://schemas.microsoft.com/office/drawing/2014/main" id="{4BF72919-7482-B552-12A8-814D4234835C}"/>
               </a:ext>
             </a:extLst>
           </p:cNvPr>
@@ -5511,7 +5508,7 @@
           <p:cNvPr id="4" name="テキスト ボックス 3">
             <a:extLst>
               <a:ext uri="{FF2B5EF4-FFF2-40B4-BE49-F238E27FC236}">
-                <a16:creationId xmlns:a16="http://schemas.microsoft.com/office/drawing/2014/main" id="{940B9753-E181-70A5-2B06-63E94C7C75A9}"/>
+                <a16:creationId xmlns:a16="http://schemas.microsoft.com/office/drawing/2014/main" id="{8046C30B-836B-7D72-2572-02C9F8A677A6}"/>
               </a:ext>
             </a:extLst>
           </p:cNvPr>
@@ -5576,7 +5573,7 @@
           <p:cNvPr id="5" name="テキスト ボックス 4">
             <a:extLst>
               <a:ext uri="{FF2B5EF4-FFF2-40B4-BE49-F238E27FC236}">
-                <a16:creationId xmlns:a16="http://schemas.microsoft.com/office/drawing/2014/main" id="{54AC48D4-8B02-8B51-F2D6-B2E9625A5063}"/>
+                <a16:creationId xmlns:a16="http://schemas.microsoft.com/office/drawing/2014/main" id="{759D91CC-36C0-5B61-C581-2690B014DA96}"/>
               </a:ext>
             </a:extLst>
           </p:cNvPr>
@@ -5623,7 +5620,7 @@
             <a:hlinkClick r:id="" action="ppaction://media"/>
             <a:extLst>
               <a:ext uri="{FF2B5EF4-FFF2-40B4-BE49-F238E27FC236}">
-                <a16:creationId xmlns:a16="http://schemas.microsoft.com/office/drawing/2014/main" id="{57FDDE05-5CCD-1809-2552-13C167F52B89}"/>
+                <a16:creationId xmlns:a16="http://schemas.microsoft.com/office/drawing/2014/main" id="{333E94D3-8540-B974-590B-3EFCA41969B2}"/>
               </a:ext>
             </a:extLst>
           </p:cNvPr>
@@ -5658,7 +5655,7 @@
     </p:spTree>
     <p:extLst>
       <p:ext uri="{BB962C8B-B14F-4D97-AF65-F5344CB8AC3E}">
-        <p14:creationId xmlns:p14="http://schemas.microsoft.com/office/powerpoint/2010/main" val="1585609129"/>
+        <p14:creationId xmlns:p14="http://schemas.microsoft.com/office/powerpoint/2010/main" val="165392859"/>
       </p:ext>
     </p:extLst>
   </p:cSld>
